--- a/docs/AEGIS-PARTNER-DECK-2026-09-10.pptx
+++ b/docs/AEGIS-PARTNER-DECK-2026-09-10.pptx
@@ -516,10 +516,266 @@
           <a:lstStyle/>
           <a:p>
             <a:r>
-              <a:rPr lang="en-US" dirty="0"/>
-              <a:t>Lead with the scope line, not the 17/17. The number is only credible because the qualification arrives in the same breath.</a:t>
+              <a:rPr sz="900">
+                <a:latin typeface="Calibri"/>
+              </a:rPr>
+              <a:t>THE MOVE</a:t>
             </a:r>
             <a:endParaRPr lang="en-US" dirty="0"/>
+          </a:p>
+          <a:p>
+            <a:r>
+              <a:rPr sz="900">
+                <a:latin typeface="Calibri"/>
+              </a:rPr>
+              <a:t>Establish that you will qualify your own claims before anyone has to ask you to.</a:t>
+            </a:r>
+          </a:p>
+          <a:p/>
+          <a:p>
+            <a:r>
+              <a:rPr sz="900">
+                <a:latin typeface="Calibri"/>
+              </a:rPr>
+              <a:t>SAY</a:t>
+            </a:r>
+          </a:p>
+          <a:p>
+            <a:r>
+              <a:rPr sz="900">
+                <a:latin typeface="Calibri"/>
+              </a:rPr>
+              <a:t>- Open with the scope, not the number: "Before I show you anything - one pack, one AWS</a:t>
+            </a:r>
+          </a:p>
+          <a:p>
+            <a:r>
+              <a:rPr sz="900">
+                <a:latin typeface="Calibri"/>
+              </a:rPr>
+              <a:t>  account, one region, synthetic data, and every piece of evidence in here was produced</a:t>
+            </a:r>
+          </a:p>
+          <a:p>
+            <a:r>
+              <a:rPr sz="900">
+                <a:latin typeface="Calibri"/>
+              </a:rPr>
+              <a:t>  by me, on my own account."</a:t>
+            </a:r>
+          </a:p>
+          <a:p>
+            <a:r>
+              <a:rPr sz="900">
+                <a:latin typeface="Calibri"/>
+              </a:rPr>
+              <a:t>- Then the number: 21 of 21, from an empty account back to an empty account, 10 September.</a:t>
+            </a:r>
+          </a:p>
+          <a:p>
+            <a:r>
+              <a:rPr sz="900">
+                <a:latin typeface="Calibri"/>
+              </a:rPr>
+              <a:t>- Then the frame, verbatim: "This is a reference architecture, not a product. No SLA, no</a:t>
+            </a:r>
+          </a:p>
+          <a:p>
+            <a:r>
+              <a:rPr sz="900">
+                <a:latin typeface="Calibri"/>
+              </a:rPr>
+              <a:t>  support contract, no certification."</a:t>
+            </a:r>
+          </a:p>
+          <a:p>
+            <a:r>
+              <a:rPr sz="900">
+                <a:latin typeface="Calibri"/>
+              </a:rPr>
+              <a:t>- Tell them the ask in the first two minutes so the rest of the meeting has a shape:</a:t>
+            </a:r>
+          </a:p>
+          <a:p>
+            <a:r>
+              <a:rPr sz="900">
+                <a:latin typeface="Calibri"/>
+              </a:rPr>
+              <a:t>  "I am going to ask you for half a day of an SA's time. That is the whole ask."</a:t>
+            </a:r>
+          </a:p>
+          <a:p/>
+          <a:p>
+            <a:r>
+              <a:rPr sz="900">
+                <a:latin typeface="Calibri"/>
+              </a:rPr>
+              <a:t>DON'T</a:t>
+            </a:r>
+          </a:p>
+          <a:p>
+            <a:r>
+              <a:rPr sz="900">
+                <a:latin typeface="Calibri"/>
+              </a:rPr>
+              <a:t>- Don't lead with 21/21. The number is only credible because the qualification arrives in</a:t>
+            </a:r>
+          </a:p>
+          <a:p>
+            <a:r>
+              <a:rPr sz="900">
+                <a:latin typeface="Calibri"/>
+              </a:rPr>
+              <a:t>  the same breath.</a:t>
+            </a:r>
+          </a:p>
+          <a:p>
+            <a:r>
+              <a:rPr sz="900">
+                <a:latin typeface="Calibri"/>
+              </a:rPr>
+              <a:t>- Don't say "platform" as though it is a product, and don't let "verified" stand alone -</a:t>
+            </a:r>
+          </a:p>
+          <a:p>
+            <a:r>
+              <a:rPr sz="900">
+                <a:latin typeface="Calibri"/>
+              </a:rPr>
+              <a:t>  verified BY ME is the accurate phrase.</a:t>
+            </a:r>
+          </a:p>
+          <a:p/>
+          <a:p>
+            <a:r>
+              <a:rPr sz="900">
+                <a:latin typeface="Calibri"/>
+              </a:rPr>
+              <a:t>Q&amp;A</a:t>
+            </a:r>
+          </a:p>
+          <a:p>
+            <a:r>
+              <a:rPr sz="900">
+                <a:latin typeface="Calibri"/>
+              </a:rPr>
+              <a:t>Q: What does "from zero" actually mean?</a:t>
+            </a:r>
+          </a:p>
+          <a:p>
+            <a:r>
+              <a:rPr sz="900">
+                <a:latin typeface="Calibri"/>
+              </a:rPr>
+              <a:t>A: The account is empty when the run starts and empty when it ends, and both facts are</a:t>
+            </a:r>
+          </a:p>
+          <a:p>
+            <a:r>
+              <a:rPr sz="900">
+                <a:latin typeface="Calibri"/>
+              </a:rPr>
+              <a:t>   established by asking AWS directly - not by trusting the teardown script's own verdict.</a:t>
+            </a:r>
+          </a:p>
+          <a:p>
+            <a:r>
+              <a:rPr sz="900">
+                <a:latin typeface="Calibri"/>
+              </a:rPr>
+              <a:t>   That distinction is not pedantry: a teardown once reported CLEAN over a live credential</a:t>
+            </a:r>
+          </a:p>
+          <a:p>
+            <a:r>
+              <a:rPr sz="900">
+                <a:latin typeface="Calibri"/>
+              </a:rPr>
+              <a:t>   provider holding a client secret. That is why there are now four separate residue checks.</a:t>
+            </a:r>
+          </a:p>
+          <a:p/>
+          <a:p>
+            <a:r>
+              <a:rPr sz="900">
+                <a:latin typeface="Calibri"/>
+              </a:rPr>
+              <a:t>Q: Is 21 of 21 better than the 17 of 17 I saw last week?</a:t>
+            </a:r>
+          </a:p>
+          <a:p>
+            <a:r>
+              <a:rPr sz="900">
+                <a:latin typeface="Calibri"/>
+              </a:rPr>
+              <a:t>A: Same platform, four more checks. The four are a governed system-of-record connector and</a:t>
+            </a:r>
+          </a:p>
+          <a:p>
+            <a:r>
+              <a:rPr sz="900">
+                <a:latin typeface="Calibri"/>
+              </a:rPr>
+              <a:t>   its residue sweep. The total going up is not the story - what the new checks measure is.</a:t>
+            </a:r>
+          </a:p>
+          <a:p>
+            <a:r>
+              <a:rPr sz="900">
+                <a:latin typeface="Calibri"/>
+              </a:rPr>
+              <a:t>   I will spend a slide on exactly that.</a:t>
+            </a:r>
+          </a:p>
+          <a:p/>
+          <a:p>
+            <a:r>
+              <a:rPr sz="900">
+                <a:latin typeface="Calibri"/>
+              </a:rPr>
+              <a:t>Q: Who is using this today?</a:t>
+            </a:r>
+          </a:p>
+          <a:p>
+            <a:r>
+              <a:rPr sz="900">
+                <a:latin typeface="Calibri"/>
+              </a:rPr>
+              <a:t>A: Nobody. That is the honest answer and it is the reason for this meeting.</a:t>
+            </a:r>
+          </a:p>
+          <a:p/>
+          <a:p>
+            <a:r>
+              <a:rPr sz="900">
+                <a:latin typeface="Calibri"/>
+              </a:rPr>
+              <a:t>Q: Why should I spend time on a reference architecture?</a:t>
+            </a:r>
+          </a:p>
+          <a:p>
+            <a:r>
+              <a:rPr sz="900">
+                <a:latin typeface="Calibri"/>
+              </a:rPr>
+              <a:t>A: Because what your customers are shipping right now is a system prompt and a log file.</a:t>
+            </a:r>
+          </a:p>
+          <a:p>
+            <a:r>
+              <a:rPr sz="900">
+                <a:latin typeface="Calibri"/>
+              </a:rPr>
+              <a:t>   This is the same problem solved somewhere the agent cannot argue with it. And the ask is</a:t>
+            </a:r>
+          </a:p>
+          <a:p>
+            <a:r>
+              <a:rPr sz="900">
+                <a:latin typeface="Calibri"/>
+              </a:rPr>
+              <a:t>   half a day, not a commitment.</a:t>
+            </a:r>
           </a:p>
         </p:txBody>
       </p:sp>
@@ -604,10 +860,258 @@
           <a:lstStyle/>
           <a:p>
             <a:r>
-              <a:rPr lang="en-US" dirty="0"/>
-              <a:t/>
+              <a:rPr sz="900">
+                <a:latin typeface="Calibri"/>
+              </a:rPr>
+              <a:t>THE MOVE</a:t>
             </a:r>
             <a:endParaRPr lang="en-US" dirty="0"/>
+          </a:p>
+          <a:p>
+            <a:r>
+              <a:rPr sz="900">
+                <a:latin typeface="Calibri"/>
+              </a:rPr>
+              <a:t>Convert the failure list from an apology into the reason the pass is believable.</a:t>
+            </a:r>
+          </a:p>
+          <a:p/>
+          <a:p>
+            <a:r>
+              <a:rPr sz="900">
+                <a:latin typeface="Calibri"/>
+              </a:rPr>
+              <a:t>SAY</a:t>
+            </a:r>
+          </a:p>
+          <a:p>
+            <a:r>
+              <a:rPr sz="900">
+                <a:latin typeface="Calibri"/>
+              </a:rPr>
+              <a:t>- The point of this slide is not the four findings. It is that the run that FAILED sits in the</a:t>
+            </a:r>
+          </a:p>
+          <a:p>
+            <a:r>
+              <a:rPr sz="900">
+                <a:latin typeface="Calibri"/>
+              </a:rPr>
+              <a:t>  same commit as the run that passed.</a:t>
+            </a:r>
+          </a:p>
+          <a:p>
+            <a:r>
+              <a:rPr sz="900">
+                <a:latin typeface="Calibri"/>
+              </a:rPr>
+              <a:t>- Say it plainly: if you read one thing to decide whether this evidence is honest, read those</a:t>
+            </a:r>
+          </a:p>
+          <a:p>
+            <a:r>
+              <a:rPr sz="900">
+                <a:latin typeface="Calibri"/>
+              </a:rPr>
+              <a:t>  two files side by side.</a:t>
+            </a:r>
+          </a:p>
+          <a:p>
+            <a:r>
+              <a:rPr sz="900">
+                <a:latin typeface="Calibri"/>
+              </a:rPr>
+              <a:t>- Seventy findings are recorded this way, including every one where I was wrong - and the</a:t>
+            </a:r>
+          </a:p>
+          <a:p>
+            <a:r>
+              <a:rPr sz="900">
+                <a:latin typeface="Calibri"/>
+              </a:rPr>
+              <a:t>  connector on the previous slide took six more runs after this one.</a:t>
+            </a:r>
+          </a:p>
+          <a:p/>
+          <a:p>
+            <a:r>
+              <a:rPr sz="900">
+                <a:latin typeface="Calibri"/>
+              </a:rPr>
+              <a:t>DON'T</a:t>
+            </a:r>
+          </a:p>
+          <a:p>
+            <a:r>
+              <a:rPr sz="900">
+                <a:latin typeface="Calibri"/>
+              </a:rPr>
+              <a:t>- Don't perform humility. State the findings flatly and let them do the work.</a:t>
+            </a:r>
+          </a:p>
+          <a:p/>
+          <a:p>
+            <a:r>
+              <a:rPr sz="900">
+                <a:latin typeface="Calibri"/>
+              </a:rPr>
+              <a:t>Q&amp;A</a:t>
+            </a:r>
+          </a:p>
+          <a:p>
+            <a:r>
+              <a:rPr sz="900">
+                <a:latin typeface="Calibri"/>
+              </a:rPr>
+              <a:t>Q: Isn't publishing your own failures a bit performative?</a:t>
+            </a:r>
+          </a:p>
+          <a:p>
+            <a:r>
+              <a:rPr sz="900">
+                <a:latin typeface="Calibri"/>
+              </a:rPr>
+              <a:t>A: Fair challenge, and the test is whether the register changes behaviour. It does: several</a:t>
+            </a:r>
+          </a:p>
+          <a:p>
+            <a:r>
+              <a:rPr sz="900">
+                <a:latin typeface="Calibri"/>
+              </a:rPr>
+              <a:t>   entries produced CI controls that now fail builds - the account-id gate, the doc-count gate,</a:t>
+            </a:r>
+          </a:p>
+          <a:p>
+            <a:r>
+              <a:rPr sz="900">
+                <a:latin typeface="Calibri"/>
+              </a:rPr>
+              <a:t>   the silenced-error gate, the stale-checkout gate. If it were performative there would be no</a:t>
+            </a:r>
+          </a:p>
+          <a:p>
+            <a:r>
+              <a:rPr sz="900">
+                <a:latin typeface="Calibri"/>
+              </a:rPr>
+              <a:t>   code attached to it.</a:t>
+            </a:r>
+          </a:p>
+          <a:p/>
+          <a:p>
+            <a:r>
+              <a:rPr sz="900">
+                <a:latin typeface="Calibri"/>
+              </a:rPr>
+              <a:t>Q: L61, the CloudTrail quota - is that going to bite us?</a:t>
+            </a:r>
+          </a:p>
+          <a:p>
+            <a:r>
+              <a:rPr sz="900">
+                <a:latin typeface="Calibri"/>
+              </a:rPr>
+              <a:t>A: Yes, and it is the one prerequisite I owe you before you start. Five trails per region, AWS</a:t>
+            </a:r>
+          </a:p>
+          <a:p>
+            <a:r>
+              <a:rPr sz="900">
+                <a:latin typeface="Calibri"/>
+              </a:rPr>
+              <a:t>   marks it not adjustable, and each deployed pack needs two. Check your account's headroom</a:t>
+            </a:r>
+          </a:p>
+          <a:p>
+            <a:r>
+              <a:rPr sz="900">
+                <a:latin typeface="Calibri"/>
+              </a:rPr>
+              <a:t>   first. The support case needs a human in the console and a Business or Enterprise support</a:t>
+            </a:r>
+          </a:p>
+          <a:p>
+            <a:r>
+              <a:rPr sz="900">
+                <a:latin typeface="Calibri"/>
+              </a:rPr>
+              <a:t>   plan, which is why it is still open.</a:t>
+            </a:r>
+          </a:p>
+          <a:p/>
+          <a:p>
+            <a:r>
+              <a:rPr sz="900">
+                <a:latin typeface="Calibri"/>
+              </a:rPr>
+              <a:t>Q: You diagnosed one error wrongly three times in a row. Why does that build confidence?</a:t>
+            </a:r>
+          </a:p>
+          <a:p>
+            <a:r>
+              <a:rPr sz="900">
+                <a:latin typeface="Calibri"/>
+              </a:rPr>
+              <a:t>A: Because the entry says so, names the real cause - AgentCore policy names are unique per</a:t>
+            </a:r>
+          </a:p>
+          <a:p>
+            <a:r>
+              <a:rPr sz="900">
+                <a:latin typeface="Calibri"/>
+              </a:rPr>
+              <a:t>   account and region, not per policy engine - and records that the repo's own code comment had</a:t>
+            </a:r>
+          </a:p>
+          <a:p>
+            <a:r>
+              <a:rPr sz="900">
+                <a:latin typeface="Calibri"/>
+              </a:rPr>
+              <a:t>   said it the whole time. The alternative version of this project is the one where that entry</a:t>
+            </a:r>
+          </a:p>
+          <a:p>
+            <a:r>
+              <a:rPr sz="900">
+                <a:latin typeface="Calibri"/>
+              </a:rPr>
+              <a:t>   does not exist and you find out later.</a:t>
+            </a:r>
+          </a:p>
+          <a:p/>
+          <a:p>
+            <a:r>
+              <a:rPr sz="900">
+                <a:latin typeface="Calibri"/>
+              </a:rPr>
+              <a:t>Q: How do I know the register is complete?</a:t>
+            </a:r>
+          </a:p>
+          <a:p>
+            <a:r>
+              <a:rPr sz="900">
+                <a:latin typeface="Calibri"/>
+              </a:rPr>
+              <a:t>A: You don't, and I can't prove a negative. What I can show you is that entries get added when</a:t>
+            </a:r>
+          </a:p>
+          <a:p>
+            <a:r>
+              <a:rPr sz="900">
+                <a:latin typeface="Calibri"/>
+              </a:rPr>
+              <a:t>   they are embarrassing, that the failed runs are committed rather than described, and that</a:t>
+            </a:r>
+          </a:p>
+          <a:p>
+            <a:r>
+              <a:rPr sz="900">
+                <a:latin typeface="Calibri"/>
+              </a:rPr>
+              <a:t>   several entries are of the form "a control I wrote was wrong".</a:t>
+            </a:r>
           </a:p>
         </p:txBody>
       </p:sp>
@@ -692,10 +1196,291 @@
           <a:lstStyle/>
           <a:p>
             <a:r>
-              <a:rPr lang="en-US" dirty="0"/>
-              <a:t/>
+              <a:rPr sz="900">
+                <a:latin typeface="Calibri"/>
+              </a:rPr>
+              <a:t>THE MOVE</a:t>
             </a:r>
             <a:endParaRPr lang="en-US" dirty="0"/>
+          </a:p>
+          <a:p>
+            <a:r>
+              <a:rPr sz="900">
+                <a:latin typeface="Calibri"/>
+              </a:rPr>
+              <a:t>Slow down. This list is longer than the proven list on purpose, and the first tile is the whole</a:t>
+            </a:r>
+          </a:p>
+          <a:p>
+            <a:r>
+              <a:rPr sz="900">
+                <a:latin typeface="Calibri"/>
+              </a:rPr>
+              <a:t>reason for the meeting.</a:t>
+            </a:r>
+          </a:p>
+          <a:p/>
+          <a:p>
+            <a:r>
+              <a:rPr sz="900">
+                <a:latin typeface="Calibri"/>
+              </a:rPr>
+              <a:t>SAY</a:t>
+            </a:r>
+          </a:p>
+          <a:p>
+            <a:r>
+              <a:rPr sz="900">
+                <a:latin typeface="Calibri"/>
+              </a:rPr>
+              <a:t>- Take this slowly and do not skip tiles to save time. Skipping is what gets found later.</a:t>
+            </a:r>
+          </a:p>
+          <a:p>
+            <a:r>
+              <a:rPr sz="900">
+                <a:latin typeface="Calibri"/>
+              </a:rPr>
+              <a:t>- Tile one is the meeting: all evidence is author-produced, one AWS account, no third party has</a:t>
+            </a:r>
+          </a:p>
+          <a:p>
+            <a:r>
+              <a:rPr sz="900">
+                <a:latin typeface="Calibri"/>
+              </a:rPr>
+              <a:t>  run it, and no amount of further self-testing closes it.</a:t>
+            </a:r>
+          </a:p>
+          <a:p>
+            <a:r>
+              <a:rPr sz="900">
+                <a:latin typeface="Calibri"/>
+              </a:rPr>
+              <a:t>- Say the closing line as a commitment: NOT-CLAIMS.md governs every other page in the</a:t>
+            </a:r>
+          </a:p>
+          <a:p>
+            <a:r>
+              <a:rPr sz="900">
+                <a:latin typeface="Calibri"/>
+              </a:rPr>
+              <a:t>  repository - if anything I have said today reads stronger than that page, that page wins.</a:t>
+            </a:r>
+          </a:p>
+          <a:p/>
+          <a:p>
+            <a:r>
+              <a:rPr sz="900">
+                <a:latin typeface="Calibri"/>
+              </a:rPr>
+              <a:t>DON'T</a:t>
+            </a:r>
+          </a:p>
+          <a:p>
+            <a:r>
+              <a:rPr sz="900">
+                <a:latin typeface="Calibri"/>
+              </a:rPr>
+              <a:t>- Don't soften any tile with "but". Each one can stand on its own.</a:t>
+            </a:r>
+          </a:p>
+          <a:p/>
+          <a:p>
+            <a:r>
+              <a:rPr sz="900">
+                <a:latin typeface="Calibri"/>
+              </a:rPr>
+              <a:t>Q&amp;A</a:t>
+            </a:r>
+          </a:p>
+          <a:p>
+            <a:r>
+              <a:rPr sz="900">
+                <a:latin typeface="Calibri"/>
+              </a:rPr>
+              <a:t>Q: 488 checkov findings is a lot.</a:t>
+            </a:r>
+          </a:p>
+          <a:p>
+            <a:r>
+              <a:rPr sz="900">
+                <a:latin typeface="Calibri"/>
+              </a:rPr>
+              <a:t>A: It is, and the number is real. They concentrate in Lambda concurrency limits, DLQs, VPC</a:t>
+            </a:r>
+          </a:p>
+          <a:p>
+            <a:r>
+              <a:rPr sz="900">
+                <a:latin typeface="Calibri"/>
+              </a:rPr>
+              <a:t>   attachment, log-group and environment KMS, DynamoDB CMK and PITR. The baseline is reviewed</a:t>
+            </a:r>
+          </a:p>
+          <a:p>
+            <a:r>
+              <a:rPr sz="900">
+                <a:latin typeface="Calibri"/>
+              </a:rPr>
+              <a:t>   and gated so NEW findings fail CI - the residual does not grow silently. Burning it down to a</a:t>
+            </a:r>
+          </a:p>
+          <a:p>
+            <a:r>
+              <a:rPr sz="900">
+                <a:latin typeface="Calibri"/>
+              </a:rPr>
+              <a:t>   justified residual is an open P1.</a:t>
+            </a:r>
+          </a:p>
+          <a:p/>
+          <a:p>
+            <a:r>
+              <a:rPr sz="900">
+                <a:latin typeface="Calibri"/>
+              </a:rPr>
+              <a:t>Q: No Organization means no SCP. How big a problem is that in public sector?</a:t>
+            </a:r>
+          </a:p>
+          <a:p>
+            <a:r>
+              <a:rPr sz="900">
+                <a:latin typeface="Calibri"/>
+              </a:rPr>
+              <a:t>A: Frequently the question that decides the deal. Today a non-governed principal calling Bedrock</a:t>
+            </a:r>
+          </a:p>
+          <a:p>
+            <a:r>
+              <a:rPr sz="900">
+                <a:latin typeface="Calibri"/>
+              </a:rPr>
+              <a:t>   directly is DETECTED, not prevented - there is a metric filter and a bypass alarm. The SCP</a:t>
+            </a:r>
+          </a:p>
+          <a:p>
+            <a:r>
+              <a:rPr sz="900">
+                <a:latin typeface="Calibri"/>
+              </a:rPr>
+              <a:t>   and the VPC-endpoint policy ship in the repo as a lint-validated template that has never been</a:t>
+            </a:r>
+          </a:p>
+          <a:p>
+            <a:r>
+              <a:rPr sz="900">
+                <a:latin typeface="Calibri"/>
+              </a:rPr>
+              <a:t>   tested in a real OU. If you can supply an OU, that is the cheapest unblock on my entire list.</a:t>
+            </a:r>
+          </a:p>
+          <a:p/>
+          <a:p>
+            <a:r>
+              <a:rPr sz="900">
+                <a:latin typeface="Calibri"/>
+              </a:rPr>
+              <a:t>Q: Why prove the COMPLIANCE lock at one day rather than seven years?</a:t>
+            </a:r>
+          </a:p>
+          <a:p>
+            <a:r>
+              <a:rPr sz="900">
+                <a:latin typeface="Calibri"/>
+              </a:rPr>
+              <a:t>A: Because at seven years I could not tear it down, and I would be showing you an untestable</a:t>
+            </a:r>
+          </a:p>
+          <a:p>
+            <a:r>
+              <a:rPr sz="900">
+                <a:latin typeface="Calibri"/>
+              </a:rPr>
+              <a:t>   claim. The mechanism IS proven: BypassGovernanceRetention is refused and the deployment's own</a:t>
+            </a:r>
+          </a:p>
+          <a:p>
+            <a:r>
+              <a:rPr sz="900">
+                <a:latin typeface="Calibri"/>
+              </a:rPr>
+              <a:t>   teardown fails. The duration is a parameter. Stating it any other way invites an auditor to</a:t>
+            </a:r>
+          </a:p>
+          <a:p>
+            <a:r>
+              <a:rPr sz="900">
+                <a:latin typeface="Calibri"/>
+              </a:rPr>
+              <a:t>   find the gap themselves.</a:t>
+            </a:r>
+          </a:p>
+          <a:p/>
+          <a:p>
+            <a:r>
+              <a:rPr sz="900">
+                <a:latin typeface="Calibri"/>
+              </a:rPr>
+              <a:t>Q: Housing wires 3 of 17 controls - why is it in the portfolio?</a:t>
+            </a:r>
+          </a:p>
+          <a:p>
+            <a:r>
+              <a:rPr sz="900">
+                <a:latin typeface="Calibri"/>
+              </a:rPr>
+              <a:t>A: It should not be presented as a peer of the other three, and this deck does not. It is at the</a:t>
+            </a:r>
+          </a:p>
+          <a:p>
+            <a:r>
+              <a:rPr sz="900">
+                <a:latin typeface="Calibri"/>
+              </a:rPr>
+              <a:t>   July Gate-B level and it is tracked as PAR-2 on the backlog.</a:t>
+            </a:r>
+          </a:p>
+          <a:p/>
+          <a:p>
+            <a:r>
+              <a:rPr sz="900">
+                <a:latin typeface="Calibri"/>
+              </a:rPr>
+              <a:t>Q: R4-2 open "deliberately" sounds like a rationalisation.</a:t>
+            </a:r>
+          </a:p>
+          <a:p>
+            <a:r>
+              <a:rPr sz="900">
+                <a:latin typeface="Calibri"/>
+              </a:rPr>
+              <a:t>A: Judge it on the mitigation. The consequential actions are refused without a cryptographic</a:t>
+            </a:r>
+          </a:p>
+          <a:p>
+            <a:r>
+              <a:rPr sz="900">
+                <a:latin typeface="Calibri"/>
+              </a:rPr>
+              <a:t>   proof of de-identification, whoever calls them. That is a stronger place to enforce than the</a:t>
+            </a:r>
+          </a:p>
+          <a:p>
+            <a:r>
+              <a:rPr sz="900">
+                <a:latin typeface="Calibri"/>
+              </a:rPr>
+              <a:t>   invocation path, and it is live-proven. If your SA can get a consequential action through</a:t>
+            </a:r>
+          </a:p>
+          <a:p>
+            <a:r>
+              <a:rPr sz="900">
+                <a:latin typeface="Calibri"/>
+              </a:rPr>
+              <a:t>   without that proof, that is the finding of the engagement and I want it.</a:t>
+            </a:r>
           </a:p>
         </p:txBody>
       </p:sp>
@@ -780,10 +1565,274 @@
           <a:lstStyle/>
           <a:p>
             <a:r>
-              <a:rPr lang="en-US" dirty="0"/>
-              <a:t/>
+              <a:rPr sz="900">
+                <a:latin typeface="Calibri"/>
+              </a:rPr>
+              <a:t>THE MOVE</a:t>
             </a:r>
             <a:endParaRPr lang="en-US" dirty="0"/>
+          </a:p>
+          <a:p>
+            <a:r>
+              <a:rPr sz="900">
+                <a:latin typeface="Calibri"/>
+              </a:rPr>
+              <a:t>Show them how you behave when your own number is wrong. This slide is about method, not alarms.</a:t>
+            </a:r>
+          </a:p>
+          <a:p/>
+          <a:p>
+            <a:r>
+              <a:rPr sz="900">
+                <a:latin typeface="Calibri"/>
+              </a:rPr>
+              <a:t>SAY</a:t>
+            </a:r>
+          </a:p>
+          <a:p>
+            <a:r>
+              <a:rPr sz="900">
+                <a:latin typeface="Calibri"/>
+              </a:rPr>
+              <a:t>- Say the claim first, then the correction, and do not soften either: we told people three</a:t>
+            </a:r>
+          </a:p>
+          <a:p>
+            <a:r>
+              <a:rPr sz="900">
+                <a:latin typeface="Calibri"/>
+              </a:rPr>
+              <a:t>  alarms. Twenty-two were deployed. Twenty-six now.</a:t>
+            </a:r>
+          </a:p>
+          <a:p>
+            <a:r>
+              <a:rPr sz="900">
+                <a:latin typeface="Calibri"/>
+              </a:rPr>
+              <a:t>- The error was the METHOD, not the arithmetic: we counted cw.Alarm( call sites in the source -</a:t>
+            </a:r>
+          </a:p>
+          <a:p>
+            <a:r>
+              <a:rPr sz="900">
+                <a:latin typeface="Calibri"/>
+              </a:rPr>
+              <a:t>  two of the three are inside loops - instead of counting what the synthesized template actually</a:t>
+            </a:r>
+          </a:p>
+          <a:p>
+            <a:r>
+              <a:rPr sz="900">
+                <a:latin typeface="Calibri"/>
+              </a:rPr>
+              <a:t>  deploys.</a:t>
+            </a:r>
+          </a:p>
+          <a:p>
+            <a:r>
+              <a:rPr sz="900">
+                <a:latin typeface="Calibri"/>
+              </a:rPr>
+              <a:t>- Then the control: a script that reads the template and counts what deploys, with an</a:t>
+            </a:r>
+          </a:p>
+          <a:p>
+            <a:r>
+              <a:rPr sz="900">
+                <a:latin typeface="Calibri"/>
+              </a:rPr>
+              <a:t>  --assert-baseline mode that fails if the numbers drift from what the partner documents quote.</a:t>
+            </a:r>
+          </a:p>
+          <a:p>
+            <a:r>
+              <a:rPr sz="900">
+                <a:latin typeface="Calibri"/>
+              </a:rPr>
+              <a:t>  The brief and the infrastructure cannot disagree silently any more.</a:t>
+            </a:r>
+          </a:p>
+          <a:p>
+            <a:r>
+              <a:rPr sz="900">
+                <a:latin typeface="Calibri"/>
+              </a:rPr>
+              <a:t>- Invite them to run it. It takes seconds and it is the cheapest trust-building step on offer.</a:t>
+            </a:r>
+          </a:p>
+          <a:p/>
+          <a:p>
+            <a:r>
+              <a:rPr sz="900">
+                <a:latin typeface="Calibri"/>
+              </a:rPr>
+              <a:t>DON'T</a:t>
+            </a:r>
+          </a:p>
+          <a:p>
+            <a:r>
+              <a:rPr sz="900">
+                <a:latin typeface="Calibri"/>
+              </a:rPr>
+              <a:t>- Don't frame this as a win. It was wrong in the direction that flattered nobody - we called our</a:t>
+            </a:r>
+          </a:p>
+          <a:p>
+            <a:r>
+              <a:rPr sz="900">
+                <a:latin typeface="Calibri"/>
+              </a:rPr>
+              <a:t>  strongest-growing area our weakest - and the point is what happened next.</a:t>
+            </a:r>
+          </a:p>
+          <a:p/>
+          <a:p>
+            <a:r>
+              <a:rPr sz="900">
+                <a:latin typeface="Calibri"/>
+              </a:rPr>
+              <a:t>Q&amp;A</a:t>
+            </a:r>
+          </a:p>
+          <a:p>
+            <a:r>
+              <a:rPr sz="900">
+                <a:latin typeface="Calibri"/>
+              </a:rPr>
+              <a:t>Q: Why is a mistake in a partner deck at all?</a:t>
+            </a:r>
+          </a:p>
+          <a:p>
+            <a:r>
+              <a:rPr sz="900">
+                <a:latin typeface="Calibri"/>
+              </a:rPr>
+              <a:t>A: Because you are going to check my numbers, and I would rather you find that I check them</a:t>
+            </a:r>
+          </a:p>
+          <a:p>
+            <a:r>
+              <a:rPr sz="900">
+                <a:latin typeface="Calibri"/>
+              </a:rPr>
+              <a:t>   first. How a team handles its own bad number is worth more signal than the number was.</a:t>
+            </a:r>
+          </a:p>
+          <a:p/>
+          <a:p>
+            <a:r>
+              <a:rPr sz="900">
+                <a:latin typeface="Calibri"/>
+              </a:rPr>
+              <a:t>Q: What else might be wrong by a factor of seven?</a:t>
+            </a:r>
+          </a:p>
+          <a:p>
+            <a:r>
+              <a:rPr sz="900">
+                <a:latin typeface="Calibri"/>
+              </a:rPr>
+              <a:t>A: The honest answer is: anything that is not gated. That is why the numbers in this deck are</a:t>
+            </a:r>
+          </a:p>
+          <a:p>
+            <a:r>
+              <a:rPr sz="900">
+                <a:latin typeface="Calibri"/>
+              </a:rPr>
+              <a:t>   the gated ones - the suite size, the alarm count, the account-id redaction, the release tag</a:t>
+            </a:r>
+          </a:p>
+          <a:p>
+            <a:r>
+              <a:rPr sz="900">
+                <a:latin typeface="Calibri"/>
+              </a:rPr>
+              <a:t>   and the silenced-error scan all fail CI on drift. Where a number is not gated I say so, and</a:t>
+            </a:r>
+          </a:p>
+          <a:p>
+            <a:r>
+              <a:rPr sz="900">
+                <a:latin typeface="Calibri"/>
+              </a:rPr>
+              <a:t>   the maturity file records which is which.</a:t>
+            </a:r>
+          </a:p>
+          <a:p/>
+          <a:p>
+            <a:r>
+              <a:rPr sz="900">
+                <a:latin typeface="Calibri"/>
+              </a:rPr>
+              <a:t>Q: Is 26 alarms enough?</a:t>
+            </a:r>
+          </a:p>
+          <a:p>
+            <a:r>
+              <a:rPr sz="900">
+                <a:latin typeface="Calibri"/>
+              </a:rPr>
+              <a:t>A: I don't know, and neither does anyone until a tier fires in a real incident. What I can tell</a:t>
+            </a:r>
+          </a:p>
+          <a:p>
+            <a:r>
+              <a:rPr sz="900">
+                <a:latin typeface="Calibri"/>
+              </a:rPr>
+              <a:t>   you is that they are NAMED - nine of them previously existed only as CloudFormation logical</a:t>
+            </a:r>
+          </a:p>
+          <a:p>
+            <a:r>
+              <a:rPr sz="900">
+                <a:latin typeface="Calibri"/>
+              </a:rPr>
+              <a:t>   ids, so no runbook could reference them and no operator could find them in the console -</a:t>
+            </a:r>
+          </a:p>
+          <a:p>
+            <a:r>
+              <a:rPr sz="900">
+                <a:latin typeface="Calibri"/>
+              </a:rPr>
+              <a:t>   they are tiered, and each has a documented first action enforced by a test.</a:t>
+            </a:r>
+          </a:p>
+          <a:p/>
+          <a:p>
+            <a:r>
+              <a:rPr sz="900">
+                <a:latin typeface="Calibri"/>
+              </a:rPr>
+              <a:t>Q: You say this is the same defect as two other register entries. Which?</a:t>
+            </a:r>
+          </a:p>
+          <a:p>
+            <a:r>
+              <a:rPr sz="900">
+                <a:latin typeface="Calibri"/>
+              </a:rPr>
+              <a:t>A: Measuring the generating code instead of the deployed artifact. It shows up as L60 and L67,</a:t>
+            </a:r>
+          </a:p>
+          <a:p>
+            <a:r>
+              <a:rPr sz="900">
+                <a:latin typeface="Calibri"/>
+              </a:rPr>
+              <a:t>   and it showed up again in the connector work. The standing rule that came out of it is the</a:t>
+            </a:r>
+          </a:p>
+          <a:p>
+            <a:r>
+              <a:rPr sz="900">
+                <a:latin typeface="Calibri"/>
+              </a:rPr>
+              <a:t>   one on the architecture diagram: measure the artifact, not the source.</a:t>
+            </a:r>
           </a:p>
         </p:txBody>
       </p:sp>
@@ -868,10 +1917,259 @@
           <a:lstStyle/>
           <a:p>
             <a:r>
-              <a:rPr lang="en-US" dirty="0"/>
-              <a:t/>
+              <a:rPr sz="900">
+                <a:latin typeface="Calibri"/>
+              </a:rPr>
+              <a:t>THE MOVE</a:t>
             </a:r>
             <a:endParaRPr lang="en-US" dirty="0"/>
+          </a:p>
+          <a:p>
+            <a:r>
+              <a:rPr sz="900">
+                <a:latin typeface="Calibri"/>
+              </a:rPr>
+              <a:t>Make the ask small, concrete, falsifiable - and make clear that a failure is a good outcome.</a:t>
+            </a:r>
+          </a:p>
+          <a:p/>
+          <a:p>
+            <a:r>
+              <a:rPr sz="900">
+                <a:latin typeface="Calibri"/>
+              </a:rPr>
+              <a:t>SAY</a:t>
+            </a:r>
+          </a:p>
+          <a:p>
+            <a:r>
+              <a:rPr sz="900">
+                <a:latin typeface="Calibri"/>
+              </a:rPr>
+              <a:t>- Say the quotation on the slide verbatim. It is the whole meeting in four sentences.</a:t>
+            </a:r>
+          </a:p>
+          <a:p>
+            <a:r>
+              <a:rPr sz="900">
+                <a:latin typeface="Calibri"/>
+              </a:rPr>
+              <a:t>- Then the seven steps, but only emphasise two: step 3 is the cheapest high-signal step, and</a:t>
+            </a:r>
+          </a:p>
+          <a:p>
+            <a:r>
+              <a:rPr sz="900">
+                <a:latin typeface="Calibri"/>
+              </a:rPr>
+              <a:t>  step 6 is the one I most want them to do.</a:t>
+            </a:r>
+          </a:p>
+          <a:p>
+            <a:r>
+              <a:rPr sz="900">
+                <a:latin typeface="Calibri"/>
+              </a:rPr>
+              <a:t>- Say this plainly: a failure is a USEFUL result. If a step does not work, or you needed a fix</a:t>
+            </a:r>
+          </a:p>
+          <a:p>
+            <a:r>
+              <a:rPr sz="900">
+                <a:latin typeface="Calibri"/>
+              </a:rPr>
+              <a:t>  that is not in the documentation, that is a real defect and recording it is the entire point.</a:t>
+            </a:r>
+          </a:p>
+          <a:p>
+            <a:r>
+              <a:rPr sz="900">
+                <a:latin typeface="Calibri"/>
+              </a:rPr>
+              <a:t>- And: please do not ask me to talk you through it. That would defeat the exercise.</a:t>
+            </a:r>
+          </a:p>
+          <a:p>
+            <a:r>
+              <a:rPr sz="900">
+                <a:latin typeface="Calibri"/>
+              </a:rPr>
+              <a:t>- Give them the CloudTrail prerequisite BEFORE they start, not after.</a:t>
+            </a:r>
+          </a:p>
+          <a:p/>
+          <a:p>
+            <a:r>
+              <a:rPr sz="900">
+                <a:latin typeface="Calibri"/>
+              </a:rPr>
+              <a:t>DON'T</a:t>
+            </a:r>
+          </a:p>
+          <a:p>
+            <a:r>
+              <a:rPr sz="900">
+                <a:latin typeface="Calibri"/>
+              </a:rPr>
+              <a:t>- Don't offer to run it for them, even to be helpful. See the last question.</a:t>
+            </a:r>
+          </a:p>
+          <a:p/>
+          <a:p>
+            <a:r>
+              <a:rPr sz="900">
+                <a:latin typeface="Calibri"/>
+              </a:rPr>
+              <a:t>Q&amp;A</a:t>
+            </a:r>
+          </a:p>
+          <a:p>
+            <a:r>
+              <a:rPr sz="900">
+                <a:latin typeface="Calibri"/>
+              </a:rPr>
+              <a:t>Q: Half a day of an SA is not nothing. What do we get?</a:t>
+            </a:r>
+          </a:p>
+          <a:p>
+            <a:r>
+              <a:rPr sz="900">
+                <a:latin typeface="Calibri"/>
+              </a:rPr>
+              <a:t>A: A defensible answer to "does this work" that is not mine, and a named list of what stands</a:t>
+            </a:r>
+          </a:p>
+          <a:p>
+            <a:r>
+              <a:rPr sz="900">
+                <a:latin typeface="Calibri"/>
+              </a:rPr>
+              <a:t>   between it and a customer pilot. If it fails, you have saved us both a customer conversation</a:t>
+            </a:r>
+          </a:p>
+          <a:p>
+            <a:r>
+              <a:rPr sz="900">
+                <a:latin typeface="Calibri"/>
+              </a:rPr>
+              <a:t>   - that is also a good outcome, and I mean that.</a:t>
+            </a:r>
+          </a:p>
+          <a:p/>
+          <a:p>
+            <a:r>
+              <a:rPr sz="900">
+                <a:latin typeface="Calibri"/>
+              </a:rPr>
+              <a:t>Q: What if our SA finds something embarrassing?</a:t>
+            </a:r>
+          </a:p>
+          <a:p>
+            <a:r>
+              <a:rPr sz="900">
+                <a:latin typeface="Calibri"/>
+              </a:rPr>
+              <a:t>A: Then it goes into the register with their finding, and it gets fixed. That is the</a:t>
+            </a:r>
+          </a:p>
+          <a:p>
+            <a:r>
+              <a:rPr sz="900">
+                <a:latin typeface="Calibri"/>
+              </a:rPr>
+              <a:t>   seventy-first entry, not a problem. The register exists precisely so that has somewhere to go.</a:t>
+            </a:r>
+          </a:p>
+          <a:p/>
+          <a:p>
+            <a:r>
+              <a:rPr sz="900">
+                <a:latin typeface="Calibri"/>
+              </a:rPr>
+              <a:t>Q: Who pays for the AWS spend?</a:t>
+            </a:r>
+          </a:p>
+          <a:p>
+            <a:r>
+              <a:rPr sz="900">
+                <a:latin typeface="Calibri"/>
+              </a:rPr>
+              <a:t>A: You do, and it is a few dollars - VPC interface endpoints, Lambda, Step Functions, DynamoDB,</a:t>
+            </a:r>
+          </a:p>
+          <a:p>
+            <a:r>
+              <a:rPr sz="900">
+                <a:latin typeface="Calibri"/>
+              </a:rPr>
+              <a:t>   KMS, one Bedrock call and one Comprehend call. Everything is torn down at the end and your SA</a:t>
+            </a:r>
+          </a:p>
+          <a:p>
+            <a:r>
+              <a:rPr sz="900">
+                <a:latin typeface="Calibri"/>
+              </a:rPr>
+              <a:t>   confirms zero residue themselves rather than taking our word for it.</a:t>
+            </a:r>
+          </a:p>
+          <a:p/>
+          <a:p>
+            <a:r>
+              <a:rPr sz="900">
+                <a:latin typeface="Calibri"/>
+              </a:rPr>
+              <a:t>Q: Could you just run it for us on a screen share?</a:t>
+            </a:r>
+          </a:p>
+          <a:p>
+            <a:r>
+              <a:rPr sz="900">
+                <a:latin typeface="Calibri"/>
+              </a:rPr>
+              <a:t>A: I could, and it would prove nothing. The entire value is that it runs in an account I do not</a:t>
+            </a:r>
+          </a:p>
+          <a:p>
+            <a:r>
+              <a:rPr sz="900">
+                <a:latin typeface="Calibri"/>
+              </a:rPr>
+              <a:t>   control, from written instructions, without me in the room. If a step does not work, that is</a:t>
+            </a:r>
+          </a:p>
+          <a:p>
+            <a:r>
+              <a:rPr sz="900">
+                <a:latin typeface="Calibri"/>
+              </a:rPr>
+              <a:t>   the finding - and if I am on the call, the finding never gets recorded.</a:t>
+            </a:r>
+          </a:p>
+          <a:p/>
+          <a:p>
+            <a:r>
+              <a:rPr sz="900">
+                <a:latin typeface="Calibri"/>
+              </a:rPr>
+              <a:t>Q: What skill level does the SA need?</a:t>
+            </a:r>
+          </a:p>
+          <a:p>
+            <a:r>
+              <a:rPr sz="900">
+                <a:latin typeface="Calibri"/>
+              </a:rPr>
+              <a:t>A: Comfortable with the AWS CLI, CDK bootstrap and Python. The harness is scripted, including a</a:t>
+            </a:r>
+          </a:p>
+          <a:p>
+            <a:r>
+              <a:rPr sz="900">
+                <a:latin typeface="Calibri"/>
+              </a:rPr>
+              <a:t>   dry-run mode that makes no AWS calls and spends nothing - start there.</a:t>
+            </a:r>
           </a:p>
         </p:txBody>
       </p:sp>
@@ -956,10 +2254,250 @@
           <a:lstStyle/>
           <a:p>
             <a:r>
-              <a:rPr lang="en-US" dirty="0"/>
-              <a:t/>
+              <a:rPr sz="900">
+                <a:latin typeface="Calibri"/>
+              </a:rPr>
+              <a:t>THE MOVE</a:t>
             </a:r>
             <a:endParaRPr lang="en-US" dirty="0"/>
+          </a:p>
+          <a:p>
+            <a:r>
+              <a:rPr sz="900">
+                <a:latin typeface="Calibri"/>
+              </a:rPr>
+              <a:t>Show a sequence with gates, and make the restraint visible: you are not asking them to find a</a:t>
+            </a:r>
+          </a:p>
+          <a:p>
+            <a:r>
+              <a:rPr sz="900">
+                <a:latin typeface="Calibri"/>
+              </a:rPr>
+              <a:t>customer.</a:t>
+            </a:r>
+          </a:p>
+          <a:p/>
+          <a:p>
+            <a:r>
+              <a:rPr sz="900">
+                <a:latin typeface="Calibri"/>
+              </a:rPr>
+              <a:t>SAY</a:t>
+            </a:r>
+          </a:p>
+          <a:p>
+            <a:r>
+              <a:rPr sz="900">
+                <a:latin typeface="Calibri"/>
+              </a:rPr>
+              <a:t>- The ORDER is the point: verify, then extend, then a customer. Each phase has a gate that has</a:t>
+            </a:r>
+          </a:p>
+          <a:p>
+            <a:r>
+              <a:rPr sz="900">
+                <a:latin typeface="Calibri"/>
+              </a:rPr>
+              <a:t>  to be met before the next one starts.</a:t>
+            </a:r>
+          </a:p>
+          <a:p>
+            <a:r>
+              <a:rPr sz="900">
+                <a:latin typeface="Calibri"/>
+              </a:rPr>
+              <a:t>- Phase B is where the connector work goes next: the same proof against a system of record we do</a:t>
+            </a:r>
+          </a:p>
+          <a:p>
+            <a:r>
+              <a:rPr sz="900">
+                <a:latin typeface="Calibri"/>
+              </a:rPr>
+              <a:t>  NOT own.</a:t>
+            </a:r>
+          </a:p>
+          <a:p>
+            <a:r>
+              <a:rPr sz="900">
+                <a:latin typeface="Calibri"/>
+              </a:rPr>
+              <a:t>- Say the last line out loud, deliberately: we are NOT asking you to find a customer yet. That</a:t>
+            </a:r>
+          </a:p>
+          <a:p>
+            <a:r>
+              <a:rPr sz="900">
+                <a:latin typeface="Calibri"/>
+              </a:rPr>
+              <a:t>  would be asking you to put your name on synthetic, author-produced evidence.</a:t>
+            </a:r>
+          </a:p>
+          <a:p/>
+          <a:p>
+            <a:r>
+              <a:rPr sz="900">
+                <a:latin typeface="Calibri"/>
+              </a:rPr>
+              <a:t>DON'T</a:t>
+            </a:r>
+          </a:p>
+          <a:p>
+            <a:r>
+              <a:rPr sz="900">
+                <a:latin typeface="Calibri"/>
+              </a:rPr>
+              <a:t>- Don't let phase C slide earlier in the conversation, even if they push. That is the move that</a:t>
+            </a:r>
+          </a:p>
+          <a:p>
+            <a:r>
+              <a:rPr sz="900">
+                <a:latin typeface="Calibri"/>
+              </a:rPr>
+              <a:t>  ends the relationship badly.</a:t>
+            </a:r>
+          </a:p>
+          <a:p/>
+          <a:p>
+            <a:r>
+              <a:rPr sz="900">
+                <a:latin typeface="Calibri"/>
+              </a:rPr>
+              <a:t>Q&amp;A</a:t>
+            </a:r>
+          </a:p>
+          <a:p>
+            <a:r>
+              <a:rPr sz="900">
+                <a:latin typeface="Calibri"/>
+              </a:rPr>
+              <a:t>Q: Quarter 2 for a pilot feels slow.</a:t>
+            </a:r>
+          </a:p>
+          <a:p>
+            <a:r>
+              <a:rPr sz="900">
+                <a:latin typeface="Calibri"/>
+              </a:rPr>
+              <a:t>A: It is paced by things I do not control: your SA's verification, a real system of record, and</a:t>
+            </a:r>
+          </a:p>
+          <a:p>
+            <a:r>
+              <a:rPr sz="900">
+                <a:latin typeface="Calibri"/>
+              </a:rPr>
+              <a:t>   a customer's own security engineering. I would rather give you a date I can hit than one that</a:t>
+            </a:r>
+          </a:p>
+          <a:p>
+            <a:r>
+              <a:rPr sz="900">
+                <a:latin typeface="Calibri"/>
+              </a:rPr>
+              <a:t>   slips. If verification goes well and you can supply an OU, phase B compresses.</a:t>
+            </a:r>
+          </a:p>
+          <a:p/>
+          <a:p>
+            <a:r>
+              <a:rPr sz="900">
+                <a:latin typeface="Calibri"/>
+              </a:rPr>
+              <a:t>Q: What if we want to go straight to a customer?</a:t>
+            </a:r>
+          </a:p>
+          <a:p>
+            <a:r>
+              <a:rPr sz="900">
+                <a:latin typeface="Calibri"/>
+              </a:rPr>
+              <a:t>A: I would push back, and my reason is as self-interested as it is principled: that asks you to</a:t>
+            </a:r>
+          </a:p>
+          <a:p>
+            <a:r>
+              <a:rPr sz="900">
+                <a:latin typeface="Calibri"/>
+              </a:rPr>
+              <a:t>   put your name on evidence that is synthetic and author-produced. If it goes wrong it goes</a:t>
+            </a:r>
+          </a:p>
+          <a:p>
+            <a:r>
+              <a:rPr sz="900">
+                <a:latin typeface="Calibri"/>
+              </a:rPr>
+              <a:t>   wrong on your relationship, not mine.</a:t>
+            </a:r>
+          </a:p>
+          <a:p/>
+          <a:p>
+            <a:r>
+              <a:rPr sz="900">
+                <a:latin typeface="Calibri"/>
+              </a:rPr>
+              <a:t>Q: What does "the customer's AO accepts the compensating-control statement" mean?</a:t>
+            </a:r>
+          </a:p>
+          <a:p>
+            <a:r>
+              <a:rPr sz="900">
+                <a:latin typeface="Calibri"/>
+              </a:rPr>
+              <a:t>A: It means the authorizing official agrees the controls present here compensate for what is</a:t>
+            </a:r>
+          </a:p>
+          <a:p>
+            <a:r>
+              <a:rPr sz="900">
+                <a:latin typeface="Calibri"/>
+              </a:rPr>
+              <a:t>   missing. That is an ATO conversation, not a checkbox, and it needs the customer's own security</a:t>
+            </a:r>
+          </a:p>
+          <a:p>
+            <a:r>
+              <a:rPr sz="900">
+                <a:latin typeface="Calibri"/>
+              </a:rPr>
+              <a:t>   engineering and testing - which is why it is phase C and not phase A.</a:t>
+            </a:r>
+          </a:p>
+          <a:p/>
+          <a:p>
+            <a:r>
+              <a:rPr sz="900">
+                <a:latin typeface="Calibri"/>
+              </a:rPr>
+              <a:t>Q: What do you need from us in phase B specifically?</a:t>
+            </a:r>
+          </a:p>
+          <a:p>
+            <a:r>
+              <a:rPr sz="900">
+                <a:latin typeface="Calibri"/>
+              </a:rPr>
+              <a:t>A: Three things, in order of value: an OU so the SCP perimeter can be tested for real; an</a:t>
+            </a:r>
+          </a:p>
+          <a:p>
+            <a:r>
+              <a:rPr sz="900">
+                <a:latin typeface="Calibri"/>
+              </a:rPr>
+              <a:t>   introduction to a system of record we do not own; and an adversarial review of the Cedar</a:t>
+            </a:r>
+          </a:p>
+          <a:p>
+            <a:r>
+              <a:rPr sz="900">
+                <a:latin typeface="Calibri"/>
+              </a:rPr>
+              <a:t>   policy set and the fault semantics.</a:t>
+            </a:r>
           </a:p>
         </p:txBody>
       </p:sp>
@@ -1044,10 +2582,250 @@
           <a:lstStyle/>
           <a:p>
             <a:r>
-              <a:rPr lang="en-US" dirty="0"/>
-              <a:t>Close on the ask, not on the 17/17.</a:t>
+              <a:rPr sz="900">
+                <a:latin typeface="Calibri"/>
+              </a:rPr>
+              <a:t>THE MOVE</a:t>
             </a:r>
             <a:endParaRPr lang="en-US" dirty="0"/>
+          </a:p>
+          <a:p>
+            <a:r>
+              <a:rPr sz="900">
+                <a:latin typeface="Calibri"/>
+              </a:rPr>
+              <a:t>Close on the ask, not on the result. Leave them with one decision, not a summary.</a:t>
+            </a:r>
+          </a:p>
+          <a:p/>
+          <a:p>
+            <a:r>
+              <a:rPr sz="900">
+                <a:latin typeface="Calibri"/>
+              </a:rPr>
+              <a:t>SAY</a:t>
+            </a:r>
+          </a:p>
+          <a:p>
+            <a:r>
+              <a:rPr sz="900">
+                <a:latin typeface="Calibri"/>
+              </a:rPr>
+              <a:t>- Say "what it is NOT" first. It costs nothing and it buys you the rest of the conversation -</a:t>
+            </a:r>
+          </a:p>
+          <a:p>
+            <a:r>
+              <a:rPr sz="900">
+                <a:latin typeface="Calibri"/>
+              </a:rPr>
+              <a:t>  and by this point in the deck it will read as consistency rather than hedging.</a:t>
+            </a:r>
+          </a:p>
+          <a:p>
+            <a:r>
+              <a:rPr sz="900">
+                <a:latin typeface="Calibri"/>
+              </a:rPr>
+              <a:t>- Then what it is: a credible governance control plane at reference-architecture maturity, with</a:t>
+            </a:r>
+          </a:p>
+          <a:p>
+            <a:r>
+              <a:rPr sz="900">
+                <a:latin typeface="Calibri"/>
+              </a:rPr>
+              <a:t>  an unusually well-documented gap list, and further along than most teams will have built</a:t>
+            </a:r>
+          </a:p>
+          <a:p>
+            <a:r>
+              <a:rPr sz="900">
+                <a:latin typeface="Calibri"/>
+              </a:rPr>
+              <a:t>  themselves.</a:t>
+            </a:r>
+          </a:p>
+          <a:p>
+            <a:r>
+              <a:rPr sz="900">
+                <a:latin typeface="Calibri"/>
+              </a:rPr>
+              <a:t>- Close on the ask, not on the 21/21: half a day of an SA's time, in an account we do not</a:t>
+            </a:r>
+          </a:p>
+          <a:p>
+            <a:r>
+              <a:rPr sz="900">
+                <a:latin typeface="Calibri"/>
+              </a:rPr>
+              <a:t>  control, to find out whether any of this survives contact with someone who is not us.</a:t>
+            </a:r>
+          </a:p>
+          <a:p>
+            <a:r>
+              <a:rPr sz="900">
+                <a:latin typeface="Calibri"/>
+              </a:rPr>
+              <a:t>- Then stop talking. The silence is doing work.</a:t>
+            </a:r>
+          </a:p>
+          <a:p/>
+          <a:p>
+            <a:r>
+              <a:rPr sz="900">
+                <a:latin typeface="Calibri"/>
+              </a:rPr>
+              <a:t>DON'T</a:t>
+            </a:r>
+          </a:p>
+          <a:p>
+            <a:r>
+              <a:rPr sz="900">
+                <a:latin typeface="Calibri"/>
+              </a:rPr>
+              <a:t>- Don't re-summarise the proven list. They have seen it, and ending on it undoes the posture the</a:t>
+            </a:r>
+          </a:p>
+          <a:p>
+            <a:r>
+              <a:rPr sz="900">
+                <a:latin typeface="Calibri"/>
+              </a:rPr>
+              <a:t>  whole deck has built.</a:t>
+            </a:r>
+          </a:p>
+          <a:p/>
+          <a:p>
+            <a:r>
+              <a:rPr sz="900">
+                <a:latin typeface="Calibri"/>
+              </a:rPr>
+              <a:t>Q&amp;A</a:t>
+            </a:r>
+          </a:p>
+          <a:p>
+            <a:r>
+              <a:rPr sz="900">
+                <a:latin typeface="Calibri"/>
+              </a:rPr>
+              <a:t>Q: What would change your mind about any of this?</a:t>
+            </a:r>
+          </a:p>
+          <a:p>
+            <a:r>
+              <a:rPr sz="900">
+                <a:latin typeface="Calibri"/>
+              </a:rPr>
+              <a:t>A: A verification run that does not reproduce. A policy set a customer cannot express in the</a:t>
+            </a:r>
+          </a:p>
+          <a:p>
+            <a:r>
+              <a:rPr sz="900">
+                <a:latin typeface="Calibri"/>
+              </a:rPr>
+              <a:t>   manifest. Or an auditor who says the evidence chain does not answer their question. Any of</a:t>
+            </a:r>
+          </a:p>
+          <a:p>
+            <a:r>
+              <a:rPr sz="900">
+                <a:latin typeface="Calibri"/>
+              </a:rPr>
+              <a:t>   those is more useful to me than agreement.</a:t>
+            </a:r>
+          </a:p>
+          <a:p/>
+          <a:p>
+            <a:r>
+              <a:rPr sz="900">
+                <a:latin typeface="Calibri"/>
+              </a:rPr>
+              <a:t>Q: Who else has looked at this?</a:t>
+            </a:r>
+          </a:p>
+          <a:p>
+            <a:r>
+              <a:rPr sz="900">
+                <a:latin typeface="Calibri"/>
+              </a:rPr>
+              <a:t>A: Four external review rounds, and each one found something real - the fault-semantics work in</a:t>
+            </a:r>
+          </a:p>
+          <a:p>
+            <a:r>
+              <a:rPr sz="900">
+                <a:latin typeface="Calibri"/>
+              </a:rPr>
+              <a:t>   core 1.10.1 came straight out of the third. No partner SA has run it. That is the gap I am</a:t>
+            </a:r>
+          </a:p>
+          <a:p>
+            <a:r>
+              <a:rPr sz="900">
+                <a:latin typeface="Calibri"/>
+              </a:rPr>
+              <a:t>   asking you to close.</a:t>
+            </a:r>
+          </a:p>
+          <a:p/>
+          <a:p>
+            <a:r>
+              <a:rPr sz="900">
+                <a:latin typeface="Calibri"/>
+              </a:rPr>
+              <a:t>Q: What happens if we say no?</a:t>
+            </a:r>
+          </a:p>
+          <a:p>
+            <a:r>
+              <a:rPr sz="900">
+                <a:latin typeface="Calibri"/>
+              </a:rPr>
+              <a:t>A: I keep building, and the credibility gap stays exactly where it is. I would rather know now</a:t>
+            </a:r>
+          </a:p>
+          <a:p>
+            <a:r>
+              <a:rPr sz="900">
+                <a:latin typeface="Calibri"/>
+              </a:rPr>
+              <a:t>   than after a customer conversation.</a:t>
+            </a:r>
+          </a:p>
+          <a:p/>
+          <a:p>
+            <a:r>
+              <a:rPr sz="900">
+                <a:latin typeface="Calibri"/>
+              </a:rPr>
+              <a:t>Q: What is the one thing you would want us to remember?</a:t>
+            </a:r>
+          </a:p>
+          <a:p>
+            <a:r>
+              <a:rPr sz="900">
+                <a:latin typeface="Calibri"/>
+              </a:rPr>
+              <a:t>A: That the governance sits in front of the model rather than inside it - and that everything I</a:t>
+            </a:r>
+          </a:p>
+          <a:p>
+            <a:r>
+              <a:rPr sz="900">
+                <a:latin typeface="Calibri"/>
+              </a:rPr>
+              <a:t>   have claimed today has either a named gate check behind it or a line on the not-proven list.</a:t>
+            </a:r>
+          </a:p>
+          <a:p>
+            <a:r>
+              <a:rPr sz="900">
+                <a:latin typeface="Calibri"/>
+              </a:rPr>
+              <a:t>   There is no third category.</a:t>
+            </a:r>
           </a:p>
         </p:txBody>
       </p:sp>
@@ -1080,6 +2858,438 @@
         <p14:creationId xmlns:p14="http://schemas.microsoft.com/office/powerpoint/2010/main" val="1024086991"/>
       </p:ext>
     </p:extLst>
+  </p:cSld>
+  <p:clrMapOvr>
+    <a:masterClrMapping/>
+  </p:clrMapOvr>
+</p:notes>
+</file>
+
+<file path=ppt/notesSlides/notesSlide16.xml><?xml version="1.0" encoding="utf-8"?>
+<p:notes xmlns:a="http://schemas.openxmlformats.org/drawingml/2006/main" xmlns:p="http://schemas.openxmlformats.org/presentationml/2006/main" xmlns:r="http://schemas.openxmlformats.org/officeDocument/2006/relationships">
+  <p:cSld>
+    <p:spTree>
+      <p:nvGrpSpPr>
+        <p:cNvPr id="1" name=""/>
+        <p:cNvGrpSpPr/>
+        <p:nvPr/>
+      </p:nvGrpSpPr>
+      <p:grpSpPr>
+        <a:xfrm>
+          <a:off x="0" y="0"/>
+          <a:ext cx="0" cy="0"/>
+          <a:chOff x="0" y="0"/>
+          <a:chExt cx="0" cy="0"/>
+        </a:xfrm>
+      </p:grpSpPr>
+      <p:sp>
+        <p:nvSpPr>
+          <p:cNvPr id="2" name="Slide Image Placeholder 1"/>
+          <p:cNvSpPr>
+            <a:spLocks noGrp="1"/>
+          </p:cNvSpPr>
+          <p:nvPr>
+            <p:ph type="sldImg" idx="2"/>
+          </p:nvPr>
+        </p:nvSpPr>
+        <p:spPr/>
+      </p:sp>
+      <p:sp>
+        <p:nvSpPr>
+          <p:cNvPr id="3" name="Notes Placeholder 2"/>
+          <p:cNvSpPr>
+            <a:spLocks noGrp="1"/>
+          </p:cNvSpPr>
+          <p:nvPr>
+            <p:ph type="body" idx="3" sz="quarter"/>
+          </p:nvPr>
+        </p:nvSpPr>
+        <p:spPr/>
+        <p:txBody>
+          <a:bodyPr/>
+          <a:lstStyle/>
+          <a:p>
+            <a:r>
+              <a:rPr sz="900">
+                <a:latin typeface="Calibri"/>
+              </a:rPr>
+              <a:t>THE MOVE</a:t>
+            </a:r>
+          </a:p>
+          <a:p>
+            <a:r>
+              <a:rPr sz="900">
+                <a:latin typeface="Calibri"/>
+              </a:rPr>
+              <a:t>This is the only substantive change since the last edition of this deck. Claim it precisely -</a:t>
+            </a:r>
+          </a:p>
+          <a:p>
+            <a:r>
+              <a:rPr sz="900">
+                <a:latin typeface="Calibri"/>
+              </a:rPr>
+              <a:t>and say "it is ours" before they work it out for themselves.</a:t>
+            </a:r>
+          </a:p>
+          <a:p/>
+          <a:p>
+            <a:r>
+              <a:rPr sz="900">
+                <a:latin typeface="Calibri"/>
+              </a:rPr>
+              <a:t>SAY</a:t>
+            </a:r>
+          </a:p>
+          <a:p>
+            <a:r>
+              <a:rPr sz="900">
+                <a:latin typeface="Calibri"/>
+              </a:rPr>
+              <a:t>- Left column, briskly: verify_source is a Gateway target; it holds NO client secret; the</a:t>
+            </a:r>
+          </a:p>
+          <a:p>
+            <a:r>
+              <a:rPr sz="900">
+                <a:latin typeface="Calibri"/>
+              </a:rPr>
+              <a:t>  outbound OAuth2 token is minted by the AgentCore Identity vault; the system of record</a:t>
+            </a:r>
+          </a:p>
+          <a:p>
+            <a:r>
+              <a:rPr sz="900">
+                <a:latin typeface="Calibri"/>
+              </a:rPr>
+              <a:t>  verifies RS256 against the issuer's live JWKS; an outsider calling it was denied by Cedar,</a:t>
+            </a:r>
+          </a:p>
+          <a:p>
+            <a:r>
+              <a:rPr sz="900">
+                <a:latin typeface="Calibri"/>
+              </a:rPr>
+              <a:t>  naming a specific policy rather than refusing everyone alike.</a:t>
+            </a:r>
+          </a:p>
+          <a:p>
+            <a:r>
+              <a:rPr sz="900">
+                <a:latin typeface="Calibri"/>
+              </a:rPr>
+              <a:t>- Then, before anyone asks, the right column: the system of record is REAL - and it is OURS.</a:t>
+            </a:r>
+          </a:p>
+          <a:p>
+            <a:r>
+              <a:rPr sz="900">
+                <a:latin typeface="Calibri"/>
+              </a:rPr>
+              <a:t>  connect_system_of_record, the one that would reach a state benefits system, stays stubbed.</a:t>
+            </a:r>
+          </a:p>
+          <a:p>
+            <a:r>
+              <a:rPr sz="900">
+                <a:latin typeface="Calibri"/>
+              </a:rPr>
+              <a:t>- The six-runs story is the credibility, not the pass. Not one of the six failures was where it</a:t>
+            </a:r>
+          </a:p>
+          <a:p>
+            <a:r>
+              <a:rPr sz="900">
+                <a:latin typeface="Calibri"/>
+              </a:rPr>
+              <a:t>  appeared to be.</a:t>
+            </a:r>
+          </a:p>
+          <a:p>
+            <a:r>
+              <a:rPr sz="900">
+                <a:latin typeface="Calibri"/>
+              </a:rPr>
+              <a:t>- Land the standing rule in the bottom band: existence is not function. An artifact check that</a:t>
+            </a:r>
+          </a:p>
+          <a:p>
+            <a:r>
+              <a:rPr sz="900">
+                <a:latin typeface="Calibri"/>
+              </a:rPr>
+              <a:t>  never exercises the thing is not evidence that the thing works.</a:t>
+            </a:r>
+          </a:p>
+          <a:p/>
+          <a:p>
+            <a:r>
+              <a:rPr sz="900">
+                <a:latin typeface="Calibri"/>
+              </a:rPr>
+              <a:t>DON'T</a:t>
+            </a:r>
+          </a:p>
+          <a:p>
+            <a:r>
+              <a:rPr sz="900">
+                <a:latin typeface="Calibri"/>
+              </a:rPr>
+              <a:t>- Don't say "we now have a system-of-record connector" without the second half of the sentence</a:t>
+            </a:r>
+          </a:p>
+          <a:p>
+            <a:r>
+              <a:rPr sz="900">
+                <a:latin typeface="Calibri"/>
+              </a:rPr>
+              <a:t>  in the same breath. That is the single most over-readable claim in the deck.</a:t>
+            </a:r>
+          </a:p>
+          <a:p/>
+          <a:p>
+            <a:r>
+              <a:rPr sz="900">
+                <a:latin typeface="Calibri"/>
+              </a:rPr>
+              <a:t>Q&amp;A</a:t>
+            </a:r>
+          </a:p>
+          <a:p>
+            <a:r>
+              <a:rPr sz="900">
+                <a:latin typeface="Calibri"/>
+              </a:rPr>
+              <a:t>Q: If it is your own mock, what has it actually proven?</a:t>
+            </a:r>
+          </a:p>
+          <a:p>
+            <a:r>
+              <a:rPr sz="900">
+                <a:latin typeface="Calibri"/>
+              </a:rPr>
+              <a:t>A: That the governed path works end to end against a real OAuth2 protocol: a token from a vault</a:t>
+            </a:r>
+          </a:p>
+          <a:p>
+            <a:r>
+              <a:rPr sz="900">
+                <a:latin typeface="Calibri"/>
+              </a:rPr>
+              <a:t>   rather than a secret in code, RS256 verified against live published keys, a 401 for an</a:t>
+            </a:r>
+          </a:p>
+          <a:p>
+            <a:r>
+              <a:rPr sz="900">
+                <a:latin typeface="Calibri"/>
+              </a:rPr>
+              <a:t>   unauthenticated caller, and Cedar denying an outsider selectively. What it has NOT proven is</a:t>
+            </a:r>
+          </a:p>
+          <a:p>
+            <a:r>
+              <a:rPr sz="900">
+                <a:latin typeface="Calibri"/>
+              </a:rPr>
+              <a:t>   anything about a customer's schema, entitlements, latency or change control. That is the next</a:t>
+            </a:r>
+          </a:p>
+          <a:p>
+            <a:r>
+              <a:rPr sz="900">
+                <a:latin typeface="Calibri"/>
+              </a:rPr>
+              <a:t>   milestone and it needs a counterparty - which is part of what I am asking you for.</a:t>
+            </a:r>
+          </a:p>
+          <a:p/>
+          <a:p>
+            <a:r>
+              <a:rPr sz="900">
+                <a:latin typeface="Calibri"/>
+              </a:rPr>
+              <a:t>Q: Six runs. Should I be worried about the engineering?</a:t>
+            </a:r>
+          </a:p>
+          <a:p>
+            <a:r>
+              <a:rPr sz="900">
+                <a:latin typeface="Calibri"/>
+              </a:rPr>
+              <a:t>A: You should judge it on the diagnosis, and I would say that either way. The failures were:</a:t>
+            </a:r>
+          </a:p>
+          <a:p>
+            <a:r>
+              <a:rPr sz="900">
+                <a:latin typeface="Calibri"/>
+              </a:rPr>
+              <a:t>   proof users that a code path never creates, an authorizer that allow-lists exactly one</a:t>
+            </a:r>
+          </a:p>
+          <a:p>
+            <a:r>
+              <a:rPr sz="900">
+                <a:latin typeface="Calibri"/>
+              </a:rPr>
+              <a:t>   client, and a Lambda environment silently left empty because a label contained a comma. None</a:t>
+            </a:r>
+          </a:p>
+          <a:p>
+            <a:r>
+              <a:rPr sz="900">
+                <a:latin typeface="Calibri"/>
+              </a:rPr>
+              <a:t>   of those is visible in a design review. Three of the six were hidden behind an error written</a:t>
+            </a:r>
+          </a:p>
+          <a:p>
+            <a:r>
+              <a:rPr sz="900">
+                <a:latin typeface="Calibri"/>
+              </a:rPr>
+              <a:t>   to /dev/null - and that defect class now fails CI.</a:t>
+            </a:r>
+          </a:p>
+          <a:p/>
+          <a:p>
+            <a:r>
+              <a:rPr sz="900">
+                <a:latin typeface="Calibri"/>
+              </a:rPr>
+              <a:t>Q: Your own gate passed twice over a broken connector. Why would I trust the gate?</a:t>
+            </a:r>
+          </a:p>
+          <a:p>
+            <a:r>
+              <a:rPr sz="900">
+                <a:latin typeface="Calibri"/>
+              </a:rPr>
+              <a:t>A: You should not trust it further than its rule allows, which is why the rule changed. It used</a:t>
+            </a:r>
+          </a:p>
+          <a:p>
+            <a:r>
+              <a:rPr sz="900">
+                <a:latin typeface="Calibri"/>
+              </a:rPr>
+              <a:t>   to pass on the connector's artifacts merely EXISTING. It now also requires the deploy to have</a:t>
+            </a:r>
+          </a:p>
+          <a:p>
+            <a:r>
+              <a:rPr sz="900">
+                <a:latin typeface="Calibri"/>
+              </a:rPr>
+              <a:t>   exited 0 and the outbound leg to have been exercised - and that rule was replayed against the</a:t>
+            </a:r>
+          </a:p>
+          <a:p>
+            <a:r>
+              <a:rPr sz="900">
+                <a:latin typeface="Calibri"/>
+              </a:rPr>
+              <a:t>   committed evidence of the two broken runs BEFORE it shipped. It fails both and passes the</a:t>
+            </a:r>
+          </a:p>
+          <a:p>
+            <a:r>
+              <a:rPr sz="900">
+                <a:latin typeface="Calibri"/>
+              </a:rPr>
+              <a:t>   proven one, where the old rule passes all three. A rule that cannot fail a run you know was</a:t>
+            </a:r>
+          </a:p>
+          <a:p>
+            <a:r>
+              <a:rPr sz="900">
+                <a:latin typeface="Calibri"/>
+              </a:rPr>
+              <a:t>   broken is not a control.</a:t>
+            </a:r>
+          </a:p>
+          <a:p/>
+          <a:p>
+            <a:r>
+              <a:rPr sz="900">
+                <a:latin typeface="Calibri"/>
+              </a:rPr>
+              <a:t>Q: How long to point this at a real system of record?</a:t>
+            </a:r>
+          </a:p>
+          <a:p>
+            <a:r>
+              <a:rPr sz="900">
+                <a:latin typeface="Calibri"/>
+              </a:rPr>
+              <a:t>A: Honestly: the engineering is days, the integration is weeks, and the variable is the</a:t>
+            </a:r>
+          </a:p>
+          <a:p>
+            <a:r>
+              <a:rPr sz="900">
+                <a:latin typeface="Calibri"/>
+              </a:rPr>
+              <a:t>   counterparty - their IdP, their network boundary, their token lifetimes, their change</a:t>
+            </a:r>
+          </a:p>
+          <a:p>
+            <a:r>
+              <a:rPr sz="900">
+                <a:latin typeface="Calibri"/>
+              </a:rPr>
+              <a:t>   control. I will not quote you a date that depends on someone else's security review.</a:t>
+            </a:r>
+          </a:p>
+          <a:p/>
+          <a:p>
+            <a:r>
+              <a:rPr sz="900">
+                <a:latin typeface="Calibri"/>
+              </a:rPr>
+              <a:t>Q: Why is connect_system_of_record still stubbed if the connector works?</a:t>
+            </a:r>
+          </a:p>
+          <a:p>
+            <a:r>
+              <a:rPr sz="900">
+                <a:latin typeface="Calibri"/>
+              </a:rPr>
+              <a:t>A: Because they are different claims. One is "the governed path can reach an OAuth2 API" and it</a:t>
+            </a:r>
+          </a:p>
+          <a:p>
+            <a:r>
+              <a:rPr sz="900">
+                <a:latin typeface="Calibri"/>
+              </a:rPr>
+              <a:t>   is proven. The other is "a customer's system of record has been governed" and it is not. The</a:t>
+            </a:r>
+          </a:p>
+          <a:p>
+            <a:r>
+              <a:rPr sz="900">
+                <a:latin typeface="Calibri"/>
+              </a:rPr>
+              <a:t>   manifest records the second as stubbed so nobody can read the first as the second.</a:t>
+            </a:r>
+          </a:p>
+        </p:txBody>
+      </p:sp>
+      <p:sp>
+        <p:nvSpPr>
+          <p:cNvPr id="4" name="Slide Number Placeholder 3"/>
+          <p:cNvSpPr>
+            <a:spLocks noGrp="1"/>
+          </p:cNvSpPr>
+          <p:nvPr>
+            <p:ph type="sldNum" idx="5" sz="quarter"/>
+          </p:nvPr>
+        </p:nvSpPr>
+        <p:spPr/>
+      </p:sp>
+    </p:spTree>
   </p:cSld>
   <p:clrMapOvr>
     <a:masterClrMapping/>
@@ -1132,10 +3342,274 @@
           <a:lstStyle/>
           <a:p>
             <a:r>
-              <a:rPr lang="en-US" dirty="0"/>
-              <a:t>If they only remember one line from the deck, it is the last one on this slide.</a:t>
+              <a:rPr sz="900">
+                <a:latin typeface="Calibri"/>
+              </a:rPr>
+              <a:t>THE MOVE</a:t>
             </a:r>
             <a:endParaRPr lang="en-US" dirty="0"/>
+          </a:p>
+          <a:p>
+            <a:r>
+              <a:rPr sz="900">
+                <a:latin typeface="Calibri"/>
+              </a:rPr>
+              <a:t>Make the category distinction land - governance INSIDE the thing being governed is not</a:t>
+            </a:r>
+          </a:p>
+          <a:p>
+            <a:r>
+              <a:rPr sz="900">
+                <a:latin typeface="Calibri"/>
+              </a:rPr>
+              <a:t>governance - so that everything after this slide has somewhere to sit.</a:t>
+            </a:r>
+          </a:p>
+          <a:p/>
+          <a:p>
+            <a:r>
+              <a:rPr sz="900">
+                <a:latin typeface="Calibri"/>
+              </a:rPr>
+              <a:t>SAY</a:t>
+            </a:r>
+          </a:p>
+          <a:p>
+            <a:r>
+              <a:rPr sz="900">
+                <a:latin typeface="Calibri"/>
+              </a:rPr>
+              <a:t>- Both of the common approaches live inside the thing they are supposed to constrain.</a:t>
+            </a:r>
+          </a:p>
+          <a:p>
+            <a:r>
+              <a:rPr sz="900">
+                <a:latin typeface="Calibri"/>
+              </a:rPr>
+              <a:t>- A prompt ASKS the model to comply. Compliance is a behaviour, not a control, and</a:t>
+            </a:r>
+          </a:p>
+          <a:p>
+            <a:r>
+              <a:rPr sz="900">
+                <a:latin typeface="Calibri"/>
+              </a:rPr>
+              <a:t>  behaviours degrade under adversarial input.</a:t>
+            </a:r>
+          </a:p>
+          <a:p>
+            <a:r>
+              <a:rPr sz="900">
+                <a:latin typeface="Calibri"/>
+              </a:rPr>
+              <a:t>- Application-code controls are genuinely better - but the agent chooses which code path to</a:t>
+            </a:r>
+          </a:p>
+          <a:p>
+            <a:r>
+              <a:rPr sz="900">
+                <a:latin typeface="Calibri"/>
+              </a:rPr>
+              <a:t>  call, so the control sits downstream of the decision it is meant to constrain.</a:t>
+            </a:r>
+          </a:p>
+          <a:p>
+            <a:r>
+              <a:rPr sz="900">
+                <a:latin typeface="Calibri"/>
+              </a:rPr>
+              <a:t>- Land the last line on the slide. If they remember one sentence from the whole deck, it is</a:t>
+            </a:r>
+          </a:p>
+          <a:p>
+            <a:r>
+              <a:rPr sz="900">
+                <a:latin typeface="Calibri"/>
+              </a:rPr>
+              <a:t>  that the governance cannot be talked out of by the agent it governs.</a:t>
+            </a:r>
+          </a:p>
+          <a:p/>
+          <a:p>
+            <a:r>
+              <a:rPr sz="900">
+                <a:latin typeface="Calibri"/>
+              </a:rPr>
+              <a:t>DON'T</a:t>
+            </a:r>
+          </a:p>
+          <a:p>
+            <a:r>
+              <a:rPr sz="900">
+                <a:latin typeface="Calibri"/>
+              </a:rPr>
+              <a:t>- Don't caricature the alternatives. Plenty of good teams are at position two, and saying so</a:t>
+            </a:r>
+          </a:p>
+          <a:p>
+            <a:r>
+              <a:rPr sz="900">
+                <a:latin typeface="Calibri"/>
+              </a:rPr>
+              <a:t>  buys you credibility for the rest.</a:t>
+            </a:r>
+          </a:p>
+          <a:p/>
+          <a:p>
+            <a:r>
+              <a:rPr sz="900">
+                <a:latin typeface="Calibri"/>
+              </a:rPr>
+              <a:t>Q&amp;A</a:t>
+            </a:r>
+          </a:p>
+          <a:p>
+            <a:r>
+              <a:rPr sz="900">
+                <a:latin typeface="Calibri"/>
+              </a:rPr>
+              <a:t>Q: Don't Bedrock Guardrails already do this?</a:t>
+            </a:r>
+          </a:p>
+          <a:p>
+            <a:r>
+              <a:rPr sz="900">
+                <a:latin typeface="Calibri"/>
+              </a:rPr>
+              <a:t>A: Guardrails filter content, and we use them - every runtime model call in the gate was</a:t>
+            </a:r>
+          </a:p>
+          <a:p>
+            <a:r>
+              <a:rPr sz="900">
+                <a:latin typeface="Calibri"/>
+              </a:rPr>
+              <a:t>   guardrail-assessed, 20 of 20. What a guardrail does not decide is whether THIS human may</a:t>
+            </a:r>
+          </a:p>
+          <a:p>
+            <a:r>
+              <a:rPr sz="900">
+                <a:latin typeface="Calibri"/>
+              </a:rPr>
+              <a:t>   invoke THIS tool against THIS tenant's data for THIS purpose within THIS budget. That is</a:t>
+            </a:r>
+          </a:p>
+          <a:p>
+            <a:r>
+              <a:rPr sz="900">
+                <a:latin typeface="Calibri"/>
+              </a:rPr>
+              <a:t>   authorization, and it is a different question. Guardrails are one control inside the</a:t>
+            </a:r>
+          </a:p>
+          <a:p>
+            <a:r>
+              <a:rPr sz="900">
+                <a:latin typeface="Calibri"/>
+              </a:rPr>
+              <a:t>   perimeter, not the perimeter.</a:t>
+            </a:r>
+          </a:p>
+          <a:p/>
+          <a:p>
+            <a:r>
+              <a:rPr sz="900">
+                <a:latin typeface="Calibri"/>
+              </a:rPr>
+              <a:t>Q: Isn't this just an API gateway with authentication?</a:t>
+            </a:r>
+          </a:p>
+          <a:p>
+            <a:r>
+              <a:rPr sz="900">
+                <a:latin typeface="Calibri"/>
+              </a:rPr>
+              <a:t>A: The difference is where the decision is made and what it is made from. Cedar evaluates the</a:t>
+            </a:r>
+          </a:p>
+          <a:p>
+            <a:r>
+              <a:rPr sz="900">
+                <a:latin typeface="Calibri"/>
+              </a:rPr>
+              <a:t>   real human's token at the AgentCore Gateway before any tool Lambda is invoked, using</a:t>
+            </a:r>
+          </a:p>
+          <a:p>
+            <a:r>
+              <a:rPr sz="900">
+                <a:latin typeface="Calibri"/>
+              </a:rPr>
+              <a:t>   context the caller cannot supply - tenant, budget and service window are injected</a:t>
+            </a:r>
+          </a:p>
+          <a:p>
+            <a:r>
+              <a:rPr sz="900">
+                <a:latin typeface="Calibri"/>
+              </a:rPr>
+              <a:t>   server-side and any caller-supplied value is stripped first.</a:t>
+            </a:r>
+          </a:p>
+          <a:p/>
+          <a:p>
+            <a:r>
+              <a:rPr sz="900">
+                <a:latin typeface="Calibri"/>
+              </a:rPr>
+              <a:t>Q: What if the model itself is the thing I can't trust?</a:t>
+            </a:r>
+          </a:p>
+          <a:p>
+            <a:r>
+              <a:rPr sz="900">
+                <a:latin typeface="Calibri"/>
+              </a:rPr>
+              <a:t>A: Then you should like this design. The model never holds a credential, never chooses the</a:t>
+            </a:r>
+          </a:p>
+          <a:p>
+            <a:r>
+              <a:rPr sz="900">
+                <a:latin typeface="Calibri"/>
+              </a:rPr>
+              <a:t>   control path, and cannot commit anything. Every consequential action terminates at a human</a:t>
+            </a:r>
+          </a:p>
+          <a:p>
+            <a:r>
+              <a:rPr sz="900">
+                <a:latin typeface="Calibri"/>
+              </a:rPr>
+              <a:t>   gate where a different verified identity approves.</a:t>
+            </a:r>
+          </a:p>
+          <a:p/>
+          <a:p>
+            <a:r>
+              <a:rPr sz="900">
+                <a:latin typeface="Calibri"/>
+              </a:rPr>
+              <a:t>Q: Where does this break down?</a:t>
+            </a:r>
+          </a:p>
+          <a:p>
+            <a:r>
+              <a:rPr sz="900">
+                <a:latin typeface="Calibri"/>
+              </a:rPr>
+              <a:t>A: When someone reaches the compute without going through the gateway. I have a slide on that</a:t>
+            </a:r>
+          </a:p>
+          <a:p>
+            <a:r>
+              <a:rPr sz="900">
+                <a:latin typeface="Calibri"/>
+              </a:rPr>
+              <a:t>   and the answer is a reopened finding, not a fix.</a:t>
+            </a:r>
           </a:p>
         </p:txBody>
       </p:sp>
@@ -1220,10 +3694,290 @@
           <a:lstStyle/>
           <a:p>
             <a:r>
-              <a:rPr lang="en-US" dirty="0"/>
-              <a:t/>
+              <a:rPr sz="900">
+                <a:latin typeface="Calibri"/>
+              </a:rPr>
+              <a:t>THE MOVE</a:t>
             </a:r>
             <a:endParaRPr lang="en-US" dirty="0"/>
+          </a:p>
+          <a:p>
+            <a:r>
+              <a:rPr sz="900">
+                <a:latin typeface="Calibri"/>
+              </a:rPr>
+              <a:t>Give them the scale of the thing - and disqualify the fourth number yourself, out loud,</a:t>
+            </a:r>
+          </a:p>
+          <a:p>
+            <a:r>
+              <a:rPr sz="900">
+                <a:latin typeface="Calibri"/>
+              </a:rPr>
+              <a:t>before anyone does it for you.</a:t>
+            </a:r>
+          </a:p>
+          <a:p/>
+          <a:p>
+            <a:r>
+              <a:rPr sz="900">
+                <a:latin typeface="Calibri"/>
+              </a:rPr>
+              <a:t>SAY</a:t>
+            </a:r>
+          </a:p>
+          <a:p>
+            <a:r>
+              <a:rPr sz="900">
+                <a:latin typeface="Calibri"/>
+              </a:rPr>
+              <a:t>- Four numbers. Three are straightforward: 13 Cedar policies at the gateway, 9 CloudFormation</a:t>
+            </a:r>
+          </a:p>
+          <a:p>
+            <a:r>
+              <a:rPr sz="900">
+                <a:latin typeface="Calibri"/>
+              </a:rPr>
+              <a:t>  stacks deployed from zero, 27 CDK switches that shape a deployment without editing code.</a:t>
+            </a:r>
+          </a:p>
+          <a:p>
+            <a:r>
+              <a:rPr sz="900">
+                <a:latin typeface="Calibri"/>
+              </a:rPr>
+              <a:t>- The fourth needs the caveat in the same breath: four packs on one hash-locked core is</a:t>
+            </a:r>
+          </a:p>
+          <a:p>
+            <a:r>
+              <a:rPr sz="900">
+                <a:latin typeface="Calibri"/>
+              </a:rPr>
+              <a:t>  evidence the core PORTS. It is not evidence the other three work. Only one has ever been</a:t>
+            </a:r>
+          </a:p>
+          <a:p>
+            <a:r>
+              <a:rPr sz="900">
+                <a:latin typeface="Calibri"/>
+              </a:rPr>
+              <a:t>  deployed.</a:t>
+            </a:r>
+          </a:p>
+          <a:p>
+            <a:r>
+              <a:rPr sz="900">
+                <a:latin typeface="Calibri"/>
+              </a:rPr>
+              <a:t>- The real platform capability is the configuration path: an agent manifest declares the tool</a:t>
+            </a:r>
+          </a:p>
+          <a:p>
+            <a:r>
+              <a:rPr sz="900">
+                <a:latin typeface="Calibri"/>
+              </a:rPr>
+              <a:t>  targets, render.py emits the gateway targets, the Cedar statements and the guardrail config.</a:t>
+            </a:r>
+          </a:p>
+          <a:p>
+            <a:r>
+              <a:rPr sz="900">
+                <a:latin typeface="Calibri"/>
+              </a:rPr>
+              <a:t>  That is what a customer would use.</a:t>
+            </a:r>
+          </a:p>
+          <a:p/>
+          <a:p>
+            <a:r>
+              <a:rPr sz="900">
+                <a:latin typeface="Calibri"/>
+              </a:rPr>
+              <a:t>DON'T</a:t>
+            </a:r>
+          </a:p>
+          <a:p>
+            <a:r>
+              <a:rPr sz="900">
+                <a:latin typeface="Calibri"/>
+              </a:rPr>
+              <a:t>- Don't let "four verticals" sit in the room unqualified for even a few seconds. It is the</a:t>
+            </a:r>
+          </a:p>
+          <a:p>
+            <a:r>
+              <a:rPr sz="900">
+                <a:latin typeface="Calibri"/>
+              </a:rPr>
+              <a:t>  single easiest thing in this deck to over-read.</a:t>
+            </a:r>
+          </a:p>
+          <a:p/>
+          <a:p>
+            <a:r>
+              <a:rPr sz="900">
+                <a:latin typeface="Calibri"/>
+              </a:rPr>
+              <a:t>Q&amp;A</a:t>
+            </a:r>
+          </a:p>
+          <a:p>
+            <a:r>
+              <a:rPr sz="900">
+                <a:latin typeface="Calibri"/>
+              </a:rPr>
+              <a:t>Q: Can I stand this up for a customer in a different domain?</a:t>
+            </a:r>
+          </a:p>
+          <a:p>
+            <a:r>
+              <a:rPr sz="900">
+                <a:latin typeface="Calibri"/>
+              </a:rPr>
+              <a:t>A: The scaffold, yes - that is what the manifest and the render pipeline are for. The thirteen</a:t>
+            </a:r>
+          </a:p>
+          <a:p>
+            <a:r>
+              <a:rPr sz="900">
+                <a:latin typeface="Calibri"/>
+              </a:rPr>
+              <a:t>   policies, no: they name benefits-specific tool actions like assess-eligibility. A customer</a:t>
+            </a:r>
+          </a:p>
+          <a:p>
+            <a:r>
+              <a:rPr sz="900">
+                <a:latin typeface="Calibri"/>
+              </a:rPr>
+              <a:t>   authors their own. "Configurable governance platform" is true; "thirteen reusable policies"</a:t>
+            </a:r>
+          </a:p>
+          <a:p>
+            <a:r>
+              <a:rPr sz="900">
+                <a:latin typeface="Calibri"/>
+              </a:rPr>
+              <a:t>   is not, and I try not to blur them.</a:t>
+            </a:r>
+          </a:p>
+          <a:p/>
+          <a:p>
+            <a:r>
+              <a:rPr sz="900">
+                <a:latin typeface="Calibri"/>
+              </a:rPr>
+              <a:t>Q: What is a CDK context switch - is that an AWS feature?</a:t>
+            </a:r>
+          </a:p>
+          <a:p>
+            <a:r>
+              <a:rPr sz="900">
+                <a:latin typeface="Calibri"/>
+              </a:rPr>
+              <a:t>A: No, it is our infrastructure code. The 27 switches cover network mode, KMS mode, retention</a:t>
+            </a:r>
+          </a:p>
+          <a:p>
+            <a:r>
+              <a:rPr sz="900">
+                <a:latin typeface="Calibri"/>
+              </a:rPr>
+              <a:t>   profile, identity mode, tenancy, perimeter, account-wide capture, model logging and the</a:t>
+            </a:r>
+          </a:p>
+          <a:p>
+            <a:r>
+              <a:rPr sz="900">
+                <a:latin typeface="Calibri"/>
+              </a:rPr>
+              <a:t>   spend ceiling.</a:t>
+            </a:r>
+          </a:p>
+          <a:p/>
+          <a:p>
+            <a:r>
+              <a:rPr sz="900">
+                <a:latin typeface="Calibri"/>
+              </a:rPr>
+              <a:t>Q: If only one pack is proven, why ship four?</a:t>
+            </a:r>
+          </a:p>
+          <a:p>
+            <a:r>
+              <a:rPr sz="900">
+                <a:latin typeface="Calibri"/>
+              </a:rPr>
+              <a:t>A: Because the property being demonstrated is that the core is consumed as a pinned,</a:t>
+            </a:r>
+          </a:p>
+          <a:p>
+            <a:r>
+              <a:rPr sz="900">
+                <a:latin typeface="Calibri"/>
+              </a:rPr>
+              <a:t>   hash-verified dependency rather than copied. That matters: we found the same control</a:t>
+            </a:r>
+          </a:p>
+          <a:p>
+            <a:r>
+              <a:rPr sz="900">
+                <a:latin typeface="Calibri"/>
+              </a:rPr>
+              <a:t>   present in two packs and missing from two others while all four integrity locks recorded</a:t>
+            </a:r>
+          </a:p>
+          <a:p>
+            <a:r>
+              <a:rPr sz="900">
+                <a:latin typeface="Calibri"/>
+              </a:rPr>
+              <a:t>   the same hash and every CI run was green. The dependency prevents that. The other three</a:t>
+            </a:r>
+          </a:p>
+          <a:p>
+            <a:r>
+              <a:rPr sz="900">
+                <a:latin typeface="Calibri"/>
+              </a:rPr>
+              <a:t>   get every fix with unit tests and a cross-repo parity check - but no live gate.</a:t>
+            </a:r>
+          </a:p>
+          <a:p/>
+          <a:p>
+            <a:r>
+              <a:rPr sz="900">
+                <a:latin typeface="Calibri"/>
+              </a:rPr>
+              <a:t>Q: Pinned by sha256 - what happens when you release a new core?</a:t>
+            </a:r>
+          </a:p>
+          <a:p>
+            <a:r>
+              <a:rPr sz="900">
+                <a:latin typeface="Calibri"/>
+              </a:rPr>
+              <a:t>A: The consumer bumps the version and the hash together, and pip refuses the install if the</a:t>
+            </a:r>
+          </a:p>
+          <a:p>
+            <a:r>
+              <a:rPr sz="900">
+                <a:latin typeface="Calibri"/>
+              </a:rPr>
+              <a:t>   artifact at that URL ever changes. That is the property that makes it a dependency rather</a:t>
+            </a:r>
+          </a:p>
+          <a:p>
+            <a:r>
+              <a:rPr sz="900">
+                <a:latin typeface="Calibri"/>
+              </a:rPr>
+              <a:t>   than a copy with extra steps.</a:t>
+            </a:r>
           </a:p>
         </p:txBody>
       </p:sp>
@@ -1308,10 +4062,282 @@
           <a:lstStyle/>
           <a:p>
             <a:r>
-              <a:rPr lang="en-US" dirty="0"/>
-              <a:t>Bet 2 is the one worth defending in detail — it is what makes reverting RT-4 defensible.</a:t>
+              <a:rPr sz="900">
+                <a:latin typeface="Calibri"/>
+              </a:rPr>
+              <a:t>THE MOVE</a:t>
             </a:r>
             <a:endParaRPr lang="en-US" dirty="0"/>
+          </a:p>
+          <a:p>
+            <a:r>
+              <a:rPr sz="900">
+                <a:latin typeface="Calibri"/>
+              </a:rPr>
+              <a:t>Show that the architecture follows from one decision, not from a shopping list of controls.</a:t>
+            </a:r>
+          </a:p>
+          <a:p/>
+          <a:p>
+            <a:r>
+              <a:rPr sz="900">
+                <a:latin typeface="Calibri"/>
+              </a:rPr>
+              <a:t>SAY</a:t>
+            </a:r>
+          </a:p>
+          <a:p>
+            <a:r>
+              <a:rPr sz="900">
+                <a:latin typeface="Calibri"/>
+              </a:rPr>
+              <a:t>- The bet: put the authorization decision somewhere the agent cannot reach, and make every</a:t>
+            </a:r>
+          </a:p>
+          <a:p>
+            <a:r>
+              <a:rPr sz="900">
+                <a:latin typeface="Calibri"/>
+              </a:rPr>
+              <a:t>  downstream control depend on a PROOF rather than a CLAIM.</a:t>
+            </a:r>
+          </a:p>
+          <a:p>
+            <a:r>
+              <a:rPr sz="900">
+                <a:latin typeface="Calibri"/>
+              </a:rPr>
+              <a:t>- Bet 2 is the one worth defending in detail - it is what makes reverting RT-4 defensible</a:t>
+            </a:r>
+          </a:p>
+          <a:p>
+            <a:r>
+              <a:rPr sz="900">
+                <a:latin typeface="Calibri"/>
+              </a:rPr>
+              <a:t>  when we get to that slide, so plant it now.</a:t>
+            </a:r>
+          </a:p>
+          <a:p>
+            <a:r>
+              <a:rPr sz="900">
+                <a:latin typeface="Calibri"/>
+              </a:rPr>
+              <a:t>- Land bet 4 deliberately: the audit row is a control, not a log. It is written BEFORE the</a:t>
+            </a:r>
+          </a:p>
+          <a:p>
+            <a:r>
+              <a:rPr sz="900">
+                <a:latin typeface="Calibri"/>
+              </a:rPr>
+              <a:t>  side effect, and a consequential commit requires the WORM copy to be durable - not just the</a:t>
+            </a:r>
+          </a:p>
+          <a:p>
+            <a:r>
+              <a:rPr sz="900">
+                <a:latin typeface="Calibri"/>
+              </a:rPr>
+              <a:t>  ledger write. That was a fault-semantics finding from an external review, not something we</a:t>
+            </a:r>
+          </a:p>
+          <a:p>
+            <a:r>
+              <a:rPr sz="900">
+                <a:latin typeface="Calibri"/>
+              </a:rPr>
+              <a:t>  got right first time.</a:t>
+            </a:r>
+          </a:p>
+          <a:p/>
+          <a:p>
+            <a:r>
+              <a:rPr sz="900">
+                <a:latin typeface="Calibri"/>
+              </a:rPr>
+              <a:t>DON'T</a:t>
+            </a:r>
+          </a:p>
+          <a:p>
+            <a:r>
+              <a:rPr sz="900">
+                <a:latin typeface="Calibri"/>
+              </a:rPr>
+              <a:t>- Don't rush bet 3. "The model is a participant, never the controller" is the sentence that</a:t>
+            </a:r>
+          </a:p>
+          <a:p>
+            <a:r>
+              <a:rPr sz="900">
+                <a:latin typeface="Calibri"/>
+              </a:rPr>
+              <a:t>  separates this from an agent framework with logging.</a:t>
+            </a:r>
+          </a:p>
+          <a:p/>
+          <a:p>
+            <a:r>
+              <a:rPr sz="900">
+                <a:latin typeface="Calibri"/>
+              </a:rPr>
+              <a:t>Q&amp;A</a:t>
+            </a:r>
+          </a:p>
+          <a:p>
+            <a:r>
+              <a:rPr sz="900">
+                <a:latin typeface="Calibri"/>
+              </a:rPr>
+              <a:t>Q: Deny-by-default sounds expensive to operate. How does anyone get work done?</a:t>
+            </a:r>
+          </a:p>
+          <a:p>
+            <a:r>
+              <a:rPr sz="900">
+                <a:latin typeface="Calibri"/>
+              </a:rPr>
+              <a:t>A: One permit grants the caseworker role the governed tools; the twelve forbids constrain how</a:t>
+            </a:r>
+          </a:p>
+          <a:p>
+            <a:r>
+              <a:rPr sz="900">
+                <a:latin typeface="Calibri"/>
+              </a:rPr>
+              <a:t>   they may be used. The friction lands on missing claims and missing proofs, which is exactly</a:t>
+            </a:r>
+          </a:p>
+          <a:p>
+            <a:r>
+              <a:rPr sz="900">
+                <a:latin typeface="Calibri"/>
+              </a:rPr>
+              <a:t>   where you want it. In the gate run a legitimate reviewer drove a full case through all ten</a:t>
+            </a:r>
+          </a:p>
+          <a:p>
+            <a:r>
+              <a:rPr sz="900">
+                <a:latin typeface="Calibri"/>
+              </a:rPr>
+              <a:t>   workflow states without touching a policy.</a:t>
+            </a:r>
+          </a:p>
+          <a:p/>
+          <a:p>
+            <a:r>
+              <a:rPr sz="900">
+                <a:latin typeface="Calibri"/>
+              </a:rPr>
+              <a:t>Q: What happens when a Cedar policy is simply wrong?</a:t>
+            </a:r>
+          </a:p>
+          <a:p>
+            <a:r>
+              <a:rPr sz="900">
+                <a:latin typeface="Calibri"/>
+              </a:rPr>
+              <a:t>A: Two answers. First, the decision is written to the ledger with the policy version that made</a:t>
+            </a:r>
+          </a:p>
+          <a:p>
+            <a:r>
+              <a:rPr sz="900">
+                <a:latin typeface="Calibri"/>
+              </a:rPr>
+              <a:t>   it, so "which policy decided this case?" is answerable from the record rather than from</a:t>
+            </a:r>
+          </a:p>
+          <a:p>
+            <a:r>
+              <a:rPr sz="900">
+                <a:latin typeface="Calibri"/>
+              </a:rPr>
+              <a:t>   someone's memory. Second, the policies are ours and a customer replaces them - that is the</a:t>
+            </a:r>
+          </a:p>
+          <a:p>
+            <a:r>
+              <a:rPr sz="900">
+                <a:latin typeface="Calibri"/>
+              </a:rPr>
+              <a:t>   design, not a dodge.</a:t>
+            </a:r>
+          </a:p>
+          <a:p/>
+          <a:p>
+            <a:r>
+              <a:rPr sz="900">
+                <a:latin typeface="Calibri"/>
+              </a:rPr>
+              <a:t>Q: Writing the record before the side effect means you record things that never happened.</a:t>
+            </a:r>
+          </a:p>
+          <a:p>
+            <a:r>
+              <a:rPr sz="900">
+                <a:latin typeface="Calibri"/>
+              </a:rPr>
+              <a:t>A: Yes, deliberately. An INTENT row with no matching outcome is a detectable anomaly and the</a:t>
+            </a:r>
+          </a:p>
+          <a:p>
+            <a:r>
+              <a:rPr sz="900">
+                <a:latin typeface="Calibri"/>
+              </a:rPr>
+              <a:t>   lineage proof looks for exactly that. The alternative - writing after - means a crash</a:t>
+            </a:r>
+          </a:p>
+          <a:p>
+            <a:r>
+              <a:rPr sz="900">
+                <a:latin typeface="Calibri"/>
+              </a:rPr>
+              <a:t>   between the action and the log leaves no record of the action at all, which is the failure</a:t>
+            </a:r>
+          </a:p>
+          <a:p>
+            <a:r>
+              <a:rPr sz="900">
+                <a:latin typeface="Calibri"/>
+              </a:rPr>
+              <a:t>   mode an auditor actually cares about.</a:t>
+            </a:r>
+          </a:p>
+          <a:p/>
+          <a:p>
+            <a:r>
+              <a:rPr sz="900">
+                <a:latin typeface="Calibri"/>
+              </a:rPr>
+              <a:t>Q: "A forged reference is refused" - refused by what?</a:t>
+            </a:r>
+          </a:p>
+          <a:p>
+            <a:r>
+              <a:rPr sz="900">
+                <a:latin typeface="Calibri"/>
+              </a:rPr>
+              <a:t>A: By the workflow guard, before the consequential step runs. The signature is issued only by</a:t>
+            </a:r>
+          </a:p>
+          <a:p>
+            <a:r>
+              <a:rPr sz="900">
+                <a:latin typeface="Calibri"/>
+              </a:rPr>
+              <a:t>   the masking control. I will spend a whole slide on this because it is the strongest thing</a:t>
+            </a:r>
+          </a:p>
+          <a:p>
+            <a:r>
+              <a:rPr sz="900">
+                <a:latin typeface="Calibri"/>
+              </a:rPr>
+              <a:t>   in the system.</a:t>
+            </a:r>
           </a:p>
         </p:txBody>
       </p:sp>
@@ -1396,10 +4422,282 @@
           <a:lstStyle/>
           <a:p>
             <a:r>
-              <a:rPr lang="en-US" dirty="0"/>
-              <a:t/>
+              <a:rPr sz="900">
+                <a:latin typeface="Calibri"/>
+              </a:rPr>
+              <a:t>THE MOVE</a:t>
             </a:r>
             <a:endParaRPr lang="en-US" dirty="0"/>
+          </a:p>
+          <a:p>
+            <a:r>
+              <a:rPr sz="900">
+                <a:latin typeface="Calibri"/>
+              </a:rPr>
+              <a:t>Orient them without reading eight bullets. Then hand them the artifact that proves you are</a:t>
+            </a:r>
+          </a:p>
+          <a:p>
+            <a:r>
+              <a:rPr sz="900">
+                <a:latin typeface="Calibri"/>
+              </a:rPr>
+              <a:t>not hiding the weak parts.</a:t>
+            </a:r>
+          </a:p>
+          <a:p/>
+          <a:p>
+            <a:r>
+              <a:rPr sz="900">
+                <a:latin typeface="Calibri"/>
+              </a:rPr>
+              <a:t>SAY</a:t>
+            </a:r>
+          </a:p>
+          <a:p>
+            <a:r>
+              <a:rPr sz="900">
+                <a:latin typeface="Calibri"/>
+              </a:rPr>
+              <a:t>- Do not read all eight. Pick three for this audience: layer 2 (authorization), layer 6</a:t>
+            </a:r>
+          </a:p>
+          <a:p>
+            <a:r>
+              <a:rPr sz="900">
+                <a:latin typeface="Calibri"/>
+              </a:rPr>
+              <a:t>  (evidence), layer 8 (containment). Offer the rest on request.</a:t>
+            </a:r>
+          </a:p>
+          <a:p>
+            <a:r>
+              <a:rPr sz="900">
+                <a:latin typeface="Calibri"/>
+              </a:rPr>
+              <a:t>- Layer 5 has a number worth saying out loud: zero NAT gateways, zero internet gateways -</a:t>
+            </a:r>
+          </a:p>
+          <a:p>
+            <a:r>
+              <a:rPr sz="900">
+                <a:latin typeface="Calibri"/>
+              </a:rPr>
+              <a:t>  MEASURED from the synthesized template, not asserted in prose.</a:t>
+            </a:r>
+          </a:p>
+          <a:p>
+            <a:r>
+              <a:rPr sz="900">
+                <a:latin typeface="Calibri"/>
+              </a:rPr>
+              <a:t>- Point at the attached architecture file and say the thing that makes it credible: every</a:t>
+            </a:r>
+          </a:p>
+          <a:p>
+            <a:r>
+              <a:rPr sz="900">
+                <a:latin typeface="Calibri"/>
+              </a:rPr>
+              <a:t>  component carries a status - LIVE, IAC-asserted, or OFF - and the OFF and adopter-owned</a:t>
+            </a:r>
+          </a:p>
+          <a:p>
+            <a:r>
+              <a:rPr sz="900">
+                <a:latin typeface="Calibri"/>
+              </a:rPr>
+              <a:t>  boxes are drawn the same size and in the same places as the live ones. A diagram that showed</a:t>
+            </a:r>
+          </a:p>
+          <a:p>
+            <a:r>
+              <a:rPr sz="900">
+                <a:latin typeface="Calibri"/>
+              </a:rPr>
+              <a:t>  only what works would be a sales diagram.</a:t>
+            </a:r>
+          </a:p>
+          <a:p/>
+          <a:p>
+            <a:r>
+              <a:rPr sz="900">
+                <a:latin typeface="Calibri"/>
+              </a:rPr>
+              <a:t>DON'T</a:t>
+            </a:r>
+          </a:p>
+          <a:p>
+            <a:r>
+              <a:rPr sz="900">
+                <a:latin typeface="Calibri"/>
+              </a:rPr>
+              <a:t>- Don't claim "Bedrock in your VPC". Say PrivateLink and mean PrivateLink.</a:t>
+            </a:r>
+          </a:p>
+          <a:p/>
+          <a:p>
+            <a:r>
+              <a:rPr sz="900">
+                <a:latin typeface="Calibri"/>
+              </a:rPr>
+              <a:t>Q&amp;A</a:t>
+            </a:r>
+          </a:p>
+          <a:p>
+            <a:r>
+              <a:rPr sz="900">
+                <a:latin typeface="Calibri"/>
+              </a:rPr>
+              <a:t>Q: Bedrock over PrivateLink - so the model runs inside my VPC?</a:t>
+            </a:r>
+          </a:p>
+          <a:p>
+            <a:r>
+              <a:rPr sz="900">
+                <a:latin typeface="Calibri"/>
+              </a:rPr>
+              <a:t>A: No, and the distinction matters enough that I correct it whenever I hear it. PrivateLink</a:t>
+            </a:r>
+          </a:p>
+          <a:p>
+            <a:r>
+              <a:rPr sz="900">
+                <a:latin typeface="Calibri"/>
+              </a:rPr>
+              <a:t>   means traffic to Bedrock does not traverse the public internet. It does not mean Bedrock</a:t>
+            </a:r>
+          </a:p>
+          <a:p>
+            <a:r>
+              <a:rPr sz="900">
+                <a:latin typeface="Calibri"/>
+              </a:rPr>
+              <a:t>   runs in your VPC.</a:t>
+            </a:r>
+          </a:p>
+          <a:p/>
+          <a:p>
+            <a:r>
+              <a:rPr sz="900">
+                <a:latin typeface="Calibri"/>
+              </a:rPr>
+              <a:t>Q: What is the difference between IaC-asserted and live-verified?</a:t>
+            </a:r>
+          </a:p>
+          <a:p>
+            <a:r>
+              <a:rPr sz="900">
+                <a:latin typeface="Calibri"/>
+              </a:rPr>
+              <a:t>A: Live-verified means a from-zero run exercised it and a named gate check proves it.</a:t>
+            </a:r>
+          </a:p>
+          <a:p>
+            <a:r>
+              <a:rPr sz="900">
+                <a:latin typeface="Calibri"/>
+              </a:rPr>
+              <a:t>   IaC-asserted means CDK builds it and a synthesis test asserts it, but no live run has</a:t>
+            </a:r>
+          </a:p>
+          <a:p>
+            <a:r>
+              <a:rPr sz="900">
+                <a:latin typeface="Calibri"/>
+              </a:rPr>
+              <a:t>   demonstrated it. WAF on the auth front door is an example of the second, and it is drawn</a:t>
+            </a:r>
+          </a:p>
+          <a:p>
+            <a:r>
+              <a:rPr sz="900">
+                <a:latin typeface="Calibri"/>
+              </a:rPr>
+              <a:t>   that way.</a:t>
+            </a:r>
+          </a:p>
+          <a:p/>
+          <a:p>
+            <a:r>
+              <a:rPr sz="900">
+                <a:latin typeface="Calibri"/>
+              </a:rPr>
+              <a:t>Q: 26 alarms - are they wired to anything, or is that a dashboard number?</a:t>
+            </a:r>
+          </a:p>
+          <a:p>
+            <a:r>
+              <a:rPr sz="900">
+                <a:latin typeface="Calibri"/>
+              </a:rPr>
+              <a:t>A: Three severity tiers, each with its own SNS topic: P1 page, P2 ticket, P3 advisory. Every</a:t>
+            </a:r>
+          </a:p>
+          <a:p>
+            <a:r>
+              <a:rPr sz="900">
+                <a:latin typeface="Calibri"/>
+              </a:rPr>
+              <a:t>   alarm has an entry in the incident runbook, enforced by a CI test - a new alarm without a</a:t>
+            </a:r>
+          </a:p>
+          <a:p>
+            <a:r>
+              <a:rPr sz="900">
+                <a:latin typeface="Calibri"/>
+              </a:rPr>
+              <a:t>   documented first action fails the build. What I cannot tell you is that any tier has ever</a:t>
+            </a:r>
+          </a:p>
+          <a:p>
+            <a:r>
+              <a:rPr sz="900">
+                <a:latin typeface="Calibri"/>
+              </a:rPr>
+              <a:t>   fired in a real incident. That is on the not-proven list and I will show you.</a:t>
+            </a:r>
+          </a:p>
+          <a:p/>
+          <a:p>
+            <a:r>
+              <a:rPr sz="900">
+                <a:latin typeface="Calibri"/>
+              </a:rPr>
+              <a:t>Q: Per-tenant isolation - is that a partition key?</a:t>
+            </a:r>
+          </a:p>
+          <a:p>
+            <a:r>
+              <a:rPr sz="900">
+                <a:latin typeface="Calibri"/>
+              </a:rPr>
+              <a:t>A: No. Each tenant gets its own tables and its own WORM bucket, not a shared table with a</a:t>
+            </a:r>
+          </a:p>
+          <a:p>
+            <a:r>
+              <a:rPr sz="900">
+                <a:latin typeface="Calibri"/>
+              </a:rPr>
+              <a:t>   tenant column. And the tenant is DERIVED from the verified token by the gateway</a:t>
+            </a:r>
+          </a:p>
+          <a:p>
+            <a:r>
+              <a:rPr sz="900">
+                <a:latin typeface="Calibri"/>
+              </a:rPr>
+              <a:t>   interceptor, never read from the request body, so cross-tenant access is impossible by</a:t>
+            </a:r>
+          </a:p>
+          <a:p>
+            <a:r>
+              <a:rPr sz="900">
+                <a:latin typeface="Calibri"/>
+              </a:rPr>
+              <a:t>   construction rather than by check.</a:t>
+            </a:r>
           </a:p>
         </p:txBody>
       </p:sp>
@@ -1484,10 +4782,258 @@
           <a:lstStyle/>
           <a:p>
             <a:r>
-              <a:rPr lang="en-US" dirty="0"/>
-              <a:t/>
+              <a:rPr sz="900">
+                <a:latin typeface="Calibri"/>
+              </a:rPr>
+              <a:t>THE MOVE</a:t>
             </a:r>
             <a:endParaRPr lang="en-US" dirty="0"/>
+          </a:p>
+          <a:p>
+            <a:r>
+              <a:rPr sz="900">
+                <a:latin typeface="Calibri"/>
+              </a:rPr>
+              <a:t>Make them feel why the asymmetry is load-bearing, not stylistic.</a:t>
+            </a:r>
+          </a:p>
+          <a:p/>
+          <a:p>
+            <a:r>
+              <a:rPr sz="900">
+                <a:latin typeface="Calibri"/>
+              </a:rPr>
+              <a:t>SAY</a:t>
+            </a:r>
+          </a:p>
+          <a:p>
+            <a:r>
+              <a:rPr sz="900">
+                <a:latin typeface="Calibri"/>
+              </a:rPr>
+              <a:t>- Cedar is forbid-wins: any single forbid that matches kills the request no matter how many</a:t>
+            </a:r>
+          </a:p>
+          <a:p>
+            <a:r>
+              <a:rPr sz="900">
+                <a:latin typeface="Calibri"/>
+              </a:rPr>
+              <a:t>  permits fire. So the twelve forbids are the product and the one permit is only the door</a:t>
+            </a:r>
+          </a:p>
+          <a:p>
+            <a:r>
+              <a:rPr sz="900">
+                <a:latin typeface="Calibri"/>
+              </a:rPr>
+              <a:t>  being unlocked.</a:t>
+            </a:r>
+          </a:p>
+          <a:p>
+            <a:r>
+              <a:rPr sz="900">
+                <a:latin typeface="Calibri"/>
+              </a:rPr>
+              <a:t>- The consequence is the failure mode most agent stacks get backwards: a caller with a missing</a:t>
+            </a:r>
+          </a:p>
+          <a:p>
+            <a:r>
+              <a:rPr sz="900">
+                <a:latin typeface="Calibri"/>
+              </a:rPr>
+              <a:t>  or malformed claim is granted ZERO tools, not all of them.</a:t>
+            </a:r>
+          </a:p>
+          <a:p>
+            <a:r>
+              <a:rPr sz="900">
+                <a:latin typeface="Calibri"/>
+              </a:rPr>
+              <a:t>- New in this run and worth saying: deny-by-default reached a NEWLY ADDED tool with no new</a:t>
+            </a:r>
+          </a:p>
+          <a:p>
+            <a:r>
+              <a:rPr sz="900">
+                <a:latin typeface="Calibri"/>
+              </a:rPr>
+              <a:t>  policy written. That is the portability claim doing real work rather than being asserted.</a:t>
+            </a:r>
+          </a:p>
+          <a:p/>
+          <a:p>
+            <a:r>
+              <a:rPr sz="900">
+                <a:latin typeface="Calibri"/>
+              </a:rPr>
+              <a:t>DON'T</a:t>
+            </a:r>
+          </a:p>
+          <a:p>
+            <a:r>
+              <a:rPr sz="900">
+                <a:latin typeface="Calibri"/>
+              </a:rPr>
+              <a:t>- Don't say "deny by default" and move on. The interesting property is that it is selective -</a:t>
+            </a:r>
+          </a:p>
+          <a:p>
+            <a:r>
+              <a:rPr sz="900">
+                <a:latin typeface="Calibri"/>
+              </a:rPr>
+              <a:t>  see the first question below, and get there before they do.</a:t>
+            </a:r>
+          </a:p>
+          <a:p/>
+          <a:p>
+            <a:r>
+              <a:rPr sz="900">
+                <a:latin typeface="Calibri"/>
+              </a:rPr>
+              <a:t>Q&amp;A</a:t>
+            </a:r>
+          </a:p>
+          <a:p>
+            <a:r>
+              <a:rPr sz="900">
+                <a:latin typeface="Calibri"/>
+              </a:rPr>
+              <a:t>Q: What if a policy has a bug and just denies everything? How would you know?</a:t>
+            </a:r>
+          </a:p>
+          <a:p>
+            <a:r>
+              <a:rPr sz="900">
+                <a:latin typeface="Calibri"/>
+              </a:rPr>
+              <a:t>A: That happened, and it is the most useful thing on this slide. On one run the outsider AND</a:t>
+            </a:r>
+          </a:p>
+          <a:p>
+            <a:r>
+              <a:rPr sz="900">
+                <a:latin typeface="Calibri"/>
+              </a:rPr>
+              <a:t>   the legitimate reviewer were denied by the same string. "Outsider denied" proved nothing,</a:t>
+            </a:r>
+          </a:p>
+          <a:p>
+            <a:r>
+              <a:rPr sz="900">
+                <a:latin typeface="Calibri"/>
+              </a:rPr>
+              <a:t>   because everything was denied - and widening the check to make it pass would have turned it</a:t>
+            </a:r>
+          </a:p>
+          <a:p>
+            <a:r>
+              <a:rPr sz="900">
+                <a:latin typeface="Calibri"/>
+              </a:rPr>
+              <a:t>   green while proving less than nothing. A deny-by-default claim is only evidence when the</a:t>
+            </a:r>
+          </a:p>
+          <a:p>
+            <a:r>
+              <a:rPr sz="900">
+                <a:latin typeface="Calibri"/>
+              </a:rPr>
+              <a:t>   denial is SELECTIVE, so the proof now requires the denial to name a specific policy.</a:t>
+            </a:r>
+          </a:p>
+          <a:p/>
+          <a:p>
+            <a:r>
+              <a:rPr sz="900">
+                <a:latin typeface="Calibri"/>
+              </a:rPr>
+              <a:t>Q: Why does every policy read "context.input has X &amp;&amp; ..."?</a:t>
+            </a:r>
+          </a:p>
+          <a:p>
+            <a:r>
+              <a:rPr sz="900">
+                <a:latin typeface="Calibri"/>
+              </a:rPr>
+              <a:t>A: Because the GA Cedar engine rejects an unguarded optional-attribute access outright. The</a:t>
+            </a:r>
+          </a:p>
+          <a:p>
+            <a:r>
+              <a:rPr sz="900">
+                <a:latin typeface="Calibri"/>
+              </a:rPr>
+              <a:t>   useful consequence is that an absent value fails CLOSED - the forbid fires.</a:t>
+            </a:r>
+          </a:p>
+          <a:p/>
+          <a:p>
+            <a:r>
+              <a:rPr sz="900">
+                <a:latin typeface="Calibri"/>
+              </a:rPr>
+              <a:t>Q: Can a caller influence the context Cedar evaluates?</a:t>
+            </a:r>
+          </a:p>
+          <a:p>
+            <a:r>
+              <a:rPr sz="900">
+                <a:latin typeface="Calibri"/>
+              </a:rPr>
+              <a:t>A: No. The interceptor strips caller-supplied consent, purpose, budget_ok and service-window</a:t>
+            </a:r>
+          </a:p>
+          <a:p>
+            <a:r>
+              <a:rPr sz="900">
+                <a:latin typeface="Calibri"/>
+              </a:rPr>
+              <a:t>   values and injects only server-derived ones - the real clock, the live meter, a pack</a:t>
+            </a:r>
+          </a:p>
+          <a:p>
+            <a:r>
+              <a:rPr sz="900">
+                <a:latin typeface="Calibri"/>
+              </a:rPr>
+              <a:t>   resolver. That came out of an external review round; the earlier version trusted caller</a:t>
+            </a:r>
+          </a:p>
+          <a:p>
+            <a:r>
+              <a:rPr sz="900">
+                <a:latin typeface="Calibri"/>
+              </a:rPr>
+              <a:t>   assertions for some of those fields.</a:t>
+            </a:r>
+          </a:p>
+          <a:p/>
+          <a:p>
+            <a:r>
+              <a:rPr sz="900">
+                <a:latin typeface="Calibri"/>
+              </a:rPr>
+              <a:t>Q: Where is the decision actually made?</a:t>
+            </a:r>
+          </a:p>
+          <a:p>
+            <a:r>
+              <a:rPr sz="900">
+                <a:latin typeface="Calibri"/>
+              </a:rPr>
+              <a:t>A: In AWS's Cedar engine at the AgentCore Gateway, before the tool Lambda is invoked. Not in</a:t>
+            </a:r>
+          </a:p>
+          <a:p>
+            <a:r>
+              <a:rPr sz="900">
+                <a:latin typeface="Calibri"/>
+              </a:rPr>
+              <a:t>   our code, and not anywhere the agent can reach.</a:t>
+            </a:r>
           </a:p>
         </p:txBody>
       </p:sp>
@@ -1572,10 +5118,250 @@
           <a:lstStyle/>
           <a:p>
             <a:r>
-              <a:rPr lang="en-US" dirty="0"/>
-              <a:t/>
+              <a:rPr sz="900">
+                <a:latin typeface="Calibri"/>
+              </a:rPr>
+              <a:t>THE MOVE</a:t>
             </a:r>
             <a:endParaRPr lang="en-US" dirty="0"/>
+          </a:p>
+          <a:p>
+            <a:r>
+              <a:rPr sz="900">
+                <a:latin typeface="Calibri"/>
+              </a:rPr>
+              <a:t>Show breadth in four groups, then disqualify the reusability claim yourself.</a:t>
+            </a:r>
+          </a:p>
+          <a:p/>
+          <a:p>
+            <a:r>
+              <a:rPr sz="900">
+                <a:latin typeface="Calibri"/>
+              </a:rPr>
+              <a:t>SAY</a:t>
+            </a:r>
+          </a:p>
+          <a:p>
+            <a:r>
+              <a:rPr sz="900">
+                <a:latin typeface="Calibri"/>
+              </a:rPr>
+              <a:t>- Walk the four groups in a sentence each. Do not read thirteen policy names.</a:t>
+            </a:r>
+          </a:p>
+          <a:p>
+            <a:r>
+              <a:rPr sz="900">
+                <a:latin typeface="Calibri"/>
+              </a:rPr>
+              <a:t>- Group B is the one to dwell on, because it sets up the next slide.</a:t>
+            </a:r>
+          </a:p>
+          <a:p>
+            <a:r>
+              <a:rPr sz="900">
+                <a:latin typeface="Calibri"/>
+              </a:rPr>
+              <a:t>- Group C is the separation-of-duties answer: the agent can never commit a determination or</a:t>
+            </a:r>
+          </a:p>
+          <a:p>
+            <a:r>
+              <a:rPr sz="900">
+                <a:latin typeface="Calibri"/>
+              </a:rPr>
+              <a:t>  raise a fraud referral - forbidden AND hidden from the advertised tool list.</a:t>
+            </a:r>
+          </a:p>
+          <a:p>
+            <a:r>
+              <a:rPr sz="900">
+                <a:latin typeface="Calibri"/>
+              </a:rPr>
+              <a:t>- Finish on the honest limit, out loud: these thirteen are a worked example, not a reusable</a:t>
+            </a:r>
+          </a:p>
+          <a:p>
+            <a:r>
+              <a:rPr sz="900">
+                <a:latin typeface="Calibri"/>
+              </a:rPr>
+              <a:t>  library. A customer authors their own against their own manifest, and THAT is the platform</a:t>
+            </a:r>
+          </a:p>
+          <a:p>
+            <a:r>
+              <a:rPr sz="900">
+                <a:latin typeface="Calibri"/>
+              </a:rPr>
+              <a:t>  capability.</a:t>
+            </a:r>
+          </a:p>
+          <a:p/>
+          <a:p>
+            <a:r>
+              <a:rPr sz="900">
+                <a:latin typeface="Calibri"/>
+              </a:rPr>
+              <a:t>DON'T</a:t>
+            </a:r>
+          </a:p>
+          <a:p>
+            <a:r>
+              <a:rPr sz="900">
+                <a:latin typeface="Calibri"/>
+              </a:rPr>
+              <a:t>- Don't let "thirteen policies" be heard as "thirteen policies you get for free".</a:t>
+            </a:r>
+          </a:p>
+          <a:p/>
+          <a:p>
+            <a:r>
+              <a:rPr sz="900">
+                <a:latin typeface="Calibri"/>
+              </a:rPr>
+              <a:t>Q&amp;A</a:t>
+            </a:r>
+          </a:p>
+          <a:p>
+            <a:r>
+              <a:rPr sz="900">
+                <a:latin typeface="Calibri"/>
+              </a:rPr>
+              <a:t>Q: The overpayment cap is $5,000 - where did that come from?</a:t>
+            </a:r>
+          </a:p>
+          <a:p>
+            <a:r>
+              <a:rPr sz="900">
+                <a:latin typeface="Calibri"/>
+              </a:rPr>
+              <a:t>A: It is illustrative. The program rules and thresholds in this pack are illustrative federal</a:t>
+            </a:r>
+          </a:p>
+          <a:p>
+            <a:r>
+              <a:rPr sz="900">
+                <a:latin typeface="Calibri"/>
+              </a:rPr>
+              <a:t>   defaults. They need a domain owner who can say what the authoritative values are and sign</a:t>
+            </a:r>
+          </a:p>
+          <a:p>
+            <a:r>
+              <a:rPr sz="900">
+                <a:latin typeface="Calibri"/>
+              </a:rPr>
+              <a:t>   off on them, and that is pilot work, not done work.</a:t>
+            </a:r>
+          </a:p>
+          <a:p/>
+          <a:p>
+            <a:r>
+              <a:rPr sz="900">
+                <a:latin typeface="Calibri"/>
+              </a:rPr>
+              <a:t>Q: Why hide finalize_determination rather than just forbid it?</a:t>
+            </a:r>
+          </a:p>
+          <a:p>
+            <a:r>
+              <a:rPr sz="900">
+                <a:latin typeface="Calibri"/>
+              </a:rPr>
+              <a:t>A: Both, deliberately. It is forbidden by Cedar AND absent from the advertised tool list, so</a:t>
+            </a:r>
+          </a:p>
+          <a:p>
+            <a:r>
+              <a:rPr sz="900">
+                <a:latin typeface="Calibri"/>
+              </a:rPr>
+              <a:t>   the agent cannot select it in the first place. The forbid is the control; the hiding removes</a:t>
+            </a:r>
+          </a:p>
+          <a:p>
+            <a:r>
+              <a:rPr sz="900">
+                <a:latin typeface="Calibri"/>
+              </a:rPr>
+              <a:t>   the temptation. Every new high-risk action gets the same treatment.</a:t>
+            </a:r>
+          </a:p>
+          <a:p/>
+          <a:p>
+            <a:r>
+              <a:rPr sz="900">
+                <a:latin typeface="Calibri"/>
+              </a:rPr>
+              <a:t>Q: Is a service window really a security control?</a:t>
+            </a:r>
+          </a:p>
+          <a:p>
+            <a:r>
+              <a:rPr sz="900">
+                <a:latin typeface="Calibri"/>
+              </a:rPr>
+              <a:t>A: It is a scope control, and the part that makes it meaningful is that it is authoritative:</a:t>
+            </a:r>
+          </a:p>
+          <a:p>
+            <a:r>
+              <a:rPr sz="900">
+                <a:latin typeface="Calibri"/>
+              </a:rPr>
+              <a:t>   set by the interceptor from the real request time, never from the caller. It is scoped to</a:t>
+            </a:r>
+          </a:p>
+          <a:p>
+            <a:r>
+              <a:rPr sz="900">
+                <a:latin typeface="Calibri"/>
+              </a:rPr>
+              <a:t>   the four consequential actions because the built-in AgentCore actions carry no input in</a:t>
+            </a:r>
+          </a:p>
+          <a:p>
+            <a:r>
+              <a:rPr sz="900">
+                <a:latin typeface="Calibri"/>
+              </a:rPr>
+              <a:t>   their context.</a:t>
+            </a:r>
+          </a:p>
+          <a:p/>
+          <a:p>
+            <a:r>
+              <a:rPr sz="900">
+                <a:latin typeface="Calibri"/>
+              </a:rPr>
+              <a:t>Q: How does a customer write their own policies - do they need Cedar expertise?</a:t>
+            </a:r>
+          </a:p>
+          <a:p>
+            <a:r>
+              <a:rPr sz="900">
+                <a:latin typeface="Calibri"/>
+              </a:rPr>
+              <a:t>A: They declare the policies in the agent manifest and the render pipeline emits the Cedar</a:t>
+            </a:r>
+          </a:p>
+          <a:p>
+            <a:r>
+              <a:rPr sz="900">
+                <a:latin typeface="Calibri"/>
+              </a:rPr>
+              <a:t>   statements with the gateway ARN substituted. Cedar expertise helps, but the manifest is the</a:t>
+            </a:r>
+          </a:p>
+          <a:p>
+            <a:r>
+              <a:rPr sz="900">
+                <a:latin typeface="Calibri"/>
+              </a:rPr>
+              <a:t>   interface. I would not pretend it is no-code.</a:t>
+            </a:r>
           </a:p>
         </p:txBody>
       </p:sp>
@@ -1660,10 +5446,387 @@
           <a:lstStyle/>
           <a:p>
             <a:r>
-              <a:rPr lang="en-US" dirty="0"/>
-              <a:t>Expect this question. Answering it with a reopened finding rather than a fix is the credibility move.</a:t>
+              <a:rPr sz="900">
+                <a:latin typeface="Calibri"/>
+              </a:rPr>
+              <a:t>THE MOVE</a:t>
             </a:r>
             <a:endParaRPr lang="en-US" dirty="0"/>
+          </a:p>
+          <a:p>
+            <a:r>
+              <a:rPr sz="900">
+                <a:latin typeface="Calibri"/>
+              </a:rPr>
+              <a:t>Land the strongest control - and then hand them the bypass question before they think to ask</a:t>
+            </a:r>
+          </a:p>
+          <a:p>
+            <a:r>
+              <a:rPr sz="900">
+                <a:latin typeface="Calibri"/>
+              </a:rPr>
+              <a:t>it. Answering with a reopened finding rather than a fix is the credibility move of the deck.</a:t>
+            </a:r>
+          </a:p>
+          <a:p/>
+          <a:p>
+            <a:r>
+              <a:rPr sz="900">
+                <a:latin typeface="Calibri"/>
+              </a:rPr>
+              <a:t>SAY</a:t>
+            </a:r>
+          </a:p>
+          <a:p>
+            <a:r>
+              <a:rPr sz="900">
+                <a:latin typeface="Calibri"/>
+              </a:rPr>
+              <a:t>- Most systems accept deidentified: true from the caller - a self-report by the party the</a:t>
+            </a:r>
+          </a:p>
+          <a:p>
+            <a:r>
+              <a:rPr sz="900">
+                <a:latin typeface="Calibri"/>
+              </a:rPr>
+              <a:t>  control constrains. Ours is a signed sanitized_ref, issued only by mask_pii, and a forged or</a:t>
+            </a:r>
+          </a:p>
+          <a:p>
+            <a:r>
+              <a:rPr sz="900">
+                <a:latin typeface="Calibri"/>
+              </a:rPr>
+              <a:t>  tampered reference is refused by the guard.</a:t>
+            </a:r>
+          </a:p>
+          <a:p>
+            <a:r>
+              <a:rPr sz="900">
+                <a:latin typeface="Calibri"/>
+              </a:rPr>
+              <a:t>- The part not on the slide: raw application text and the drafted notice never cross workflow</a:t>
+            </a:r>
+          </a:p>
+          <a:p>
+            <a:r>
+              <a:rPr sz="900">
+                <a:latin typeface="Calibri"/>
+              </a:rPr>
+              <a:t>  state AT ALL. Only opaque references do. Pass-by-reference, not pass-by-value.</a:t>
+            </a:r>
+          </a:p>
+          <a:p>
+            <a:r>
+              <a:rPr sz="900">
+                <a:latin typeface="Calibri"/>
+              </a:rPr>
+              <a:t>- Strict PII canary: zero leaks across CloudWatch Logs, X-Ray, the DLQ and Step Functions</a:t>
+            </a:r>
+          </a:p>
+          <a:p>
+            <a:r>
+              <a:rPr sz="900">
+                <a:latin typeface="Calibri"/>
+              </a:rPr>
+              <a:t>  execution history.</a:t>
+            </a:r>
+          </a:p>
+          <a:p>
+            <a:r>
+              <a:rPr sz="900">
+                <a:latin typeface="Calibri"/>
+              </a:rPr>
+              <a:t>- Then volunteer the bypass question yourself: "The obvious attack is, what if someone skips</a:t>
+            </a:r>
+          </a:p>
+          <a:p>
+            <a:r>
+              <a:rPr sz="900">
+                <a:latin typeface="Calibri"/>
+              </a:rPr>
+              <a:t>  the gateway?" Give the RT-4 answer below.</a:t>
+            </a:r>
+          </a:p>
+          <a:p/>
+          <a:p>
+            <a:r>
+              <a:rPr sz="900">
+                <a:latin typeface="Calibri"/>
+              </a:rPr>
+              <a:t>DON'T</a:t>
+            </a:r>
+          </a:p>
+          <a:p>
+            <a:r>
+              <a:rPr sz="900">
+                <a:latin typeface="Calibri"/>
+              </a:rPr>
+              <a:t>- Don't present RT-4 as a fix. It is an OPEN finding, R4-2, and saying so is worth more than</a:t>
+            </a:r>
+          </a:p>
+          <a:p>
+            <a:r>
+              <a:rPr sz="900">
+                <a:latin typeface="Calibri"/>
+              </a:rPr>
+              <a:t>  claiming it closed.</a:t>
+            </a:r>
+          </a:p>
+          <a:p/>
+          <a:p>
+            <a:r>
+              <a:rPr sz="900">
+                <a:latin typeface="Calibri"/>
+              </a:rPr>
+              <a:t>Q&amp;A</a:t>
+            </a:r>
+          </a:p>
+          <a:p>
+            <a:r>
+              <a:rPr sz="900">
+                <a:latin typeface="Calibri"/>
+              </a:rPr>
+              <a:t>Q: What if someone bypasses the gateway and invokes the runtime directly?</a:t>
+            </a:r>
+          </a:p>
+          <a:p>
+            <a:r>
+              <a:rPr sz="900">
+                <a:latin typeface="Calibri"/>
+              </a:rPr>
+              <a:t>A: We built exactly that control - RT-4, gateway-only runtime invocation. It worked. And</a:t>
+            </a:r>
+          </a:p>
+          <a:p>
+            <a:r>
+              <a:rPr sz="900">
+                <a:latin typeface="Calibri"/>
+              </a:rPr>
+              <a:t>   because the gateway sits downstream of the runtime in this topology, it left the agent with</a:t>
+            </a:r>
+          </a:p>
+          <a:p>
+            <a:r>
+              <a:rPr sz="900">
+                <a:latin typeface="Calibri"/>
+              </a:rPr>
+              <a:t>   no permitted invoker and failed four gate checks. So it is now opt-in and off by default,</a:t>
+            </a:r>
+          </a:p>
+          <a:p>
+            <a:r>
+              <a:rPr sz="900">
+                <a:latin typeface="Calibri"/>
+              </a:rPr>
+              <a:t>   and R4-2 is OPEN in the register. The mitigation is these four mask_before_* forbids: they</a:t>
+            </a:r>
+          </a:p>
+          <a:p>
+            <a:r>
+              <a:rPr sz="900">
+                <a:latin typeface="Calibri"/>
+              </a:rPr>
+              <a:t>   refuse the consequential ACTIONS unless the payload is provably de-identified, whoever</a:t>
+            </a:r>
+          </a:p>
+          <a:p>
+            <a:r>
+              <a:rPr sz="900">
+                <a:latin typeface="Calibri"/>
+              </a:rPr>
+              <a:t>   calls. RT-4 would have closed a path; these close the action - which is the stronger place</a:t>
+            </a:r>
+          </a:p>
+          <a:p>
+            <a:r>
+              <a:rPr sz="900">
+                <a:latin typeface="Calibri"/>
+              </a:rPr>
+              <a:t>   to enforce, and it is live-proven rather than unit-tested.</a:t>
+            </a:r>
+          </a:p>
+          <a:p/>
+          <a:p>
+            <a:r>
+              <a:rPr sz="900">
+                <a:latin typeface="Calibri"/>
+              </a:rPr>
+              <a:t>Q: What signs the sanitized_ref, and what happens if that secret leaks?</a:t>
+            </a:r>
+          </a:p>
+          <a:p>
+            <a:r>
+              <a:rPr sz="900">
+                <a:latin typeface="Calibri"/>
+              </a:rPr>
+              <a:t>A: HMAC-SHA256 with a per-deployment shared secret in AWS Secrets Manager. Symmetric is</a:t>
+            </a:r>
+          </a:p>
+          <a:p>
+            <a:r>
+              <a:rPr sz="900">
+                <a:latin typeface="Calibri"/>
+              </a:rPr>
+              <a:t>   deliberate: signer and verifier are two Lambdas in the SAME deployment and account, already</a:t>
+            </a:r>
+          </a:p>
+          <a:p>
+            <a:r>
+              <a:rPr sz="900">
+                <a:latin typeface="Calibri"/>
+              </a:rPr>
+              <a:t>   inside one trust boundary. Where a boundary is actually crossed - the connector reaching the</a:t>
+            </a:r>
+          </a:p>
+          <a:p>
+            <a:r>
+              <a:rPr sz="900">
+                <a:latin typeface="Calibri"/>
+              </a:rPr>
+              <a:t>   system of record - it is asymmetric RS256 against published JWKS. If the secret leaked you</a:t>
+            </a:r>
+          </a:p>
+          <a:p>
+            <a:r>
+              <a:rPr sz="900">
+                <a:latin typeface="Calibri"/>
+              </a:rPr>
+              <a:t>   could forge a reference, which is why it is in Secrets Manager rather than the template,</a:t>
+            </a:r>
+          </a:p>
+          <a:p>
+            <a:r>
+              <a:rPr sz="900">
+                <a:latin typeface="Calibri"/>
+              </a:rPr>
+              <a:t>   cached only on a SUCCESSFUL read, and fails closed when unreadable. A plaintext env fallback</a:t>
+            </a:r>
+          </a:p>
+          <a:p>
+            <a:r>
+              <a:rPr sz="900">
+                <a:latin typeface="Calibri"/>
+              </a:rPr>
+              <a:t>   exists for disposable sandbox validation only. Attack it - it is on the break-it list.</a:t>
+            </a:r>
+          </a:p>
+          <a:p/>
+          <a:p>
+            <a:r>
+              <a:rPr sz="900">
+                <a:latin typeface="Calibri"/>
+              </a:rPr>
+              <a:t>Q: Why not KMS asymmetric signing everywhere?</a:t>
+            </a:r>
+          </a:p>
+          <a:p>
+            <a:r>
+              <a:rPr sz="900">
+                <a:latin typeface="Calibri"/>
+              </a:rPr>
+              <a:t>A: It would be machinery without a threat to answer: inside one account the two parties already</a:t>
+            </a:r>
+          </a:p>
+          <a:p>
+            <a:r>
+              <a:rPr sz="900">
+                <a:latin typeface="Calibri"/>
+              </a:rPr>
+              <a:t>   share a trust boundary, so asymmetric buys non-repudiation between parties that do not need</a:t>
+            </a:r>
+          </a:p>
+          <a:p>
+            <a:r>
+              <a:rPr sz="900">
+                <a:latin typeface="Calibri"/>
+              </a:rPr>
+              <a:t>   it. The moment the boundary is real, the design switches. If your threat model says otherwise</a:t>
+            </a:r>
+          </a:p>
+          <a:p>
+            <a:r>
+              <a:rPr sz="900">
+                <a:latin typeface="Calibri"/>
+              </a:rPr>
+              <a:t>   I would genuinely like to hear it.</a:t>
+            </a:r>
+          </a:p>
+          <a:p/>
+          <a:p>
+            <a:r>
+              <a:rPr sz="900">
+                <a:latin typeface="Calibri"/>
+              </a:rPr>
+              <a:t>Q: Comprehend is not perfect at PII detection.</a:t>
+            </a:r>
+          </a:p>
+          <a:p>
+            <a:r>
+              <a:rPr sz="900">
+                <a:latin typeface="Calibri"/>
+              </a:rPr>
+              <a:t>A: Agreed, and the platform does not rely on it alone. There is a Luhn-checked regex backstop</a:t>
+            </a:r>
+          </a:p>
+          <a:p>
+            <a:r>
+              <a:rPr sz="900">
+                <a:latin typeface="Calibri"/>
+              </a:rPr>
+              <a:t>   for SSN, email, phone, IP and card, and UTF-8 byte-window chunking so a record larger than</a:t>
+            </a:r>
+          </a:p>
+          <a:p>
+            <a:r>
+              <a:rPr sz="900">
+                <a:latin typeface="Calibri"/>
+              </a:rPr>
+              <a:t>   Comprehend's synchronous size limit does not get its tail returned unmasked. That was a real</a:t>
+            </a:r>
+          </a:p>
+          <a:p>
+            <a:r>
+              <a:rPr sz="900">
+                <a:latin typeface="Calibri"/>
+              </a:rPr>
+              <a:t>   defect, found and fixed in core 1.10.0.</a:t>
+            </a:r>
+          </a:p>
+          <a:p/>
+          <a:p>
+            <a:r>
+              <a:rPr sz="900">
+                <a:latin typeface="Calibri"/>
+              </a:rPr>
+              <a:t>Q: Zero leaks across four surfaces - how hard did you look?</a:t>
+            </a:r>
+          </a:p>
+          <a:p>
+            <a:r>
+              <a:rPr sz="900">
+                <a:latin typeface="Calibri"/>
+              </a:rPr>
+              <a:t>A: A strict canary with known markers, checked in Logs, X-Ray, the DLQ and Step Functions</a:t>
+            </a:r>
+          </a:p>
+          <a:p>
+            <a:r>
+              <a:rPr sz="900">
+                <a:latin typeface="Calibri"/>
+              </a:rPr>
+              <a:t>   history. It is a canary, not a pen test. There has been no penetration test at all and that</a:t>
+            </a:r>
+          </a:p>
+          <a:p>
+            <a:r>
+              <a:rPr sz="900">
+                <a:latin typeface="Calibri"/>
+              </a:rPr>
+              <a:t>   is on the not-proven list.</a:t>
+            </a:r>
           </a:p>
         </p:txBody>
       </p:sp>
@@ -1748,10 +5911,266 @@
           <a:lstStyle/>
           <a:p>
             <a:r>
-              <a:rPr lang="en-US" dirty="0"/>
-              <a:t/>
+              <a:rPr sz="900">
+                <a:latin typeface="Calibri"/>
+              </a:rPr>
+              <a:t>THE MOVE</a:t>
             </a:r>
             <a:endParaRPr lang="en-US" dirty="0"/>
+          </a:p>
+          <a:p>
+            <a:r>
+              <a:rPr sz="900">
+                <a:latin typeface="Calibri"/>
+              </a:rPr>
+              <a:t>Give them the result with its scope attached, and make it easy to check rather than easy to</a:t>
+            </a:r>
+          </a:p>
+          <a:p>
+            <a:r>
+              <a:rPr sz="900">
+                <a:latin typeface="Calibri"/>
+              </a:rPr>
+              <a:t>believe.</a:t>
+            </a:r>
+          </a:p>
+          <a:p/>
+          <a:p>
+            <a:r>
+              <a:rPr sz="900">
+                <a:latin typeface="Calibri"/>
+              </a:rPr>
+              <a:t>SAY</a:t>
+            </a:r>
+          </a:p>
+          <a:p>
+            <a:r>
+              <a:rPr sz="900">
+                <a:latin typeface="Calibri"/>
+              </a:rPr>
+              <a:t>- Read the scope line FIRST, then the grid. One pack, one account, one region, two tenants,</a:t>
+            </a:r>
+          </a:p>
+          <a:p>
+            <a:r>
+              <a:rPr sz="900">
+                <a:latin typeface="Calibri"/>
+              </a:rPr>
+              <a:t>  synthetic data, run ben-fpg.</a:t>
+            </a:r>
+          </a:p>
+          <a:p>
+            <a:r>
+              <a:rPr sz="900">
+                <a:latin typeface="Calibri"/>
+              </a:rPr>
+              <a:t>- Do not read ten tiles. Pick three this audience cares about and say the CHECK NAME out loud</a:t>
+            </a:r>
+          </a:p>
+          <a:p>
+            <a:r>
+              <a:rPr sz="900">
+                <a:latin typeface="Calibri"/>
+              </a:rPr>
+              <a:t>  - they can grep for it in the evidence file.</a:t>
+            </a:r>
+          </a:p>
+          <a:p>
+            <a:r>
+              <a:rPr sz="900">
+                <a:latin typeface="Calibri"/>
+              </a:rPr>
+              <a:t>- Offer the evidence file by name and offer the failed run beside it. That offer is more</a:t>
+            </a:r>
+          </a:p>
+          <a:p>
+            <a:r>
+              <a:rPr sz="900">
+                <a:latin typeface="Calibri"/>
+              </a:rPr>
+              <a:t>  persuasive than the grid.</a:t>
+            </a:r>
+          </a:p>
+          <a:p/>
+          <a:p>
+            <a:r>
+              <a:rPr sz="900">
+                <a:latin typeface="Calibri"/>
+              </a:rPr>
+              <a:t>DON'T</a:t>
+            </a:r>
+          </a:p>
+          <a:p>
+            <a:r>
+              <a:rPr sz="900">
+                <a:latin typeface="Calibri"/>
+              </a:rPr>
+              <a:t>- Don't let "proven" drift into "certified". Nothing here is certified.</a:t>
+            </a:r>
+          </a:p>
+          <a:p/>
+          <a:p>
+            <a:r>
+              <a:rPr sz="900">
+                <a:latin typeface="Calibri"/>
+              </a:rPr>
+              <a:t>Q&amp;A</a:t>
+            </a:r>
+          </a:p>
+          <a:p>
+            <a:r>
+              <a:rPr sz="900">
+                <a:latin typeface="Calibri"/>
+              </a:rPr>
+              <a:t>Q: Can I see the evidence file?</a:t>
+            </a:r>
+          </a:p>
+          <a:p>
+            <a:r>
+              <a:rPr sz="900">
+                <a:latin typeface="Calibri"/>
+              </a:rPr>
+              <a:t>A: Yes - it is committed in the repository, and so is the failed run immediately before it, in</a:t>
+            </a:r>
+          </a:p>
+          <a:p>
+            <a:r>
+              <a:rPr sz="900">
+                <a:latin typeface="Calibri"/>
+              </a:rPr>
+              <a:t>   the same commit. I would rather you read those two side by side than take this grid at face</a:t>
+            </a:r>
+          </a:p>
+          <a:p>
+            <a:r>
+              <a:rPr sz="900">
+                <a:latin typeface="Calibri"/>
+              </a:rPr>
+              <a:t>   value. It is the cheapest high-signal thing you can do.</a:t>
+            </a:r>
+          </a:p>
+          <a:p/>
+          <a:p>
+            <a:r>
+              <a:rPr sz="900">
+                <a:latin typeface="Calibri"/>
+              </a:rPr>
+              <a:t>Q: What does "audit routing 12/12, transparency 13/13 per tenant" actually mean?</a:t>
+            </a:r>
+          </a:p>
+          <a:p>
+            <a:r>
+              <a:rPr sz="900">
+                <a:latin typeface="Calibri"/>
+              </a:rPr>
+              <a:t>A: Two tenants with physically separate stores. Twelve isolation assertions confirm each</a:t>
+            </a:r>
+          </a:p>
+          <a:p>
+            <a:r>
+              <a:rPr sz="900">
+                <a:latin typeface="Calibri"/>
+              </a:rPr>
+              <a:t>   tenant's records land in that tenant's own ledger, WORM vault and approvals table - and</a:t>
+            </a:r>
+          </a:p>
+          <a:p>
+            <a:r>
+              <a:rPr sz="900">
+                <a:latin typeface="Calibri"/>
+              </a:rPr>
+              <a:t>   that the other tenant cannot reach them. Thirteen transparency assertions confirm the</a:t>
+            </a:r>
+          </a:p>
+          <a:p>
+            <a:r>
+              <a:rPr sz="900">
+                <a:latin typeface="Calibri"/>
+              </a:rPr>
+              <a:t>   correlation set - tenant, session, trace, MCP session, execution, request, case - is present</a:t>
+            </a:r>
+          </a:p>
+          <a:p>
+            <a:r>
+              <a:rPr sz="900">
+                <a:latin typeface="Calibri"/>
+              </a:rPr>
+              <a:t>   and joinable, per tenant.</a:t>
+            </a:r>
+          </a:p>
+          <a:p/>
+          <a:p>
+            <a:r>
+              <a:rPr sz="900">
+                <a:latin typeface="Calibri"/>
+              </a:rPr>
+              <a:t>Q: Nine stacks in 722 seconds - cold account or warm?</a:t>
+            </a:r>
+          </a:p>
+          <a:p>
+            <a:r>
+              <a:rPr sz="900">
+                <a:latin typeface="Calibri"/>
+              </a:rPr>
+              <a:t>A: Cold. Empty account with CDK bootstrapped, no prior resources. The preflight check refuses</a:t>
+            </a:r>
+          </a:p>
+          <a:p>
+            <a:r>
+              <a:rPr sz="900">
+                <a:latin typeface="Calibri"/>
+              </a:rPr>
+              <a:t>   to deploy at all if any gateway, policy engine or agent runtime carrying the prefix already</a:t>
+            </a:r>
+          </a:p>
+          <a:p>
+            <a:r>
+              <a:rPr sz="900">
+                <a:latin typeface="Calibri"/>
+              </a:rPr>
+              <a:t>   exists - that check exists because a leftover policy engine from a sibling pack once held</a:t>
+            </a:r>
+          </a:p>
+          <a:p>
+            <a:r>
+              <a:rPr sz="900">
+                <a:latin typeface="Calibri"/>
+              </a:rPr>
+              <a:t>   the policy names and produced three wrong diagnoses.</a:t>
+            </a:r>
+          </a:p>
+          <a:p/>
+          <a:p>
+            <a:r>
+              <a:rPr sz="900">
+                <a:latin typeface="Calibri"/>
+              </a:rPr>
+              <a:t>Q: What is NOT in this grid?</a:t>
+            </a:r>
+          </a:p>
+          <a:p>
+            <a:r>
+              <a:rPr sz="900">
+                <a:latin typeface="Calibri"/>
+              </a:rPr>
+              <a:t>A: Real data, a customer system of record, an Organization-level perimeter, and any</a:t>
+            </a:r>
+          </a:p>
+          <a:p>
+            <a:r>
+              <a:rPr sz="900">
+                <a:latin typeface="Calibri"/>
+              </a:rPr>
+              <a:t>   verification by someone who is not me. The next-but-one slide is that list, and it is</a:t>
+            </a:r>
+          </a:p>
+          <a:p>
+            <a:r>
+              <a:rPr sz="900">
+                <a:latin typeface="Calibri"/>
+              </a:rPr>
+              <a:t>   longer than this one.</a:t>
+            </a:r>
           </a:p>
         </p:txBody>
       </p:sp>
